--- a/ML_Bubble_2026_Submission_Deck.pptx
+++ b/ML_Bubble_2026_Submission_Deck.pptx
@@ -374,11 +374,11 @@
         </c:ser>
         <c:gapWidth val="150"/>
         <c:overlap val="0"/>
-        <c:axId val="74414324"/>
-        <c:axId val="17049384"/>
+        <c:axId val="97033707"/>
+        <c:axId val="74340213"/>
       </c:barChart>
       <c:catAx>
-        <c:axId val="74414324"/>
+        <c:axId val="97033707"/>
         <c:scaling>
           <c:orientation val="minMax"/>
         </c:scaling>
@@ -411,7 +411,7 @@
             </a:pPr>
           </a:p>
         </c:txPr>
-        <c:crossAx val="17049384"/>
+        <c:crossAx val="74340213"/>
         <c:crosses val="autoZero"/>
         <c:auto val="1"/>
         <c:lblAlgn val="ctr"/>
@@ -419,7 +419,7 @@
         <c:noMultiLvlLbl val="0"/>
       </c:catAx>
       <c:valAx>
-        <c:axId val="17049384"/>
+        <c:axId val="74340213"/>
         <c:scaling>
           <c:orientation val="minMax"/>
           <c:max val="0.27"/>
@@ -454,7 +454,7 @@
             </a:pPr>
           </a:p>
         </c:txPr>
-        <c:crossAx val="74414324"/>
+        <c:crossAx val="97033707"/>
         <c:crossBetween val="between"/>
       </c:valAx>
       <c:spPr>
@@ -488,9 +488,11 @@
 <cs:chartStyle xmlns:cs="http://schemas.microsoft.com/office/drawing/2012/chartStyle" xmlns:a="http://schemas.openxmlformats.org/drawingml/2006/main" id="419">
   <cs:axisTitle>
     <cs:lnRef idx="0"/>
+    <cs:lineWidthScale>1</cs:lineWidthScale>
     <cs:fillRef idx="0"/>
     <cs:effectRef idx="0"/>
     <cs:fontRef idx="minor"/>
+    <a:defRPr sz="1800" b="0"/>
   </cs:axisTitle>
   <cs:categoryAxis>
     <cs:lnRef idx="0"/>
@@ -1043,7 +1045,7 @@
             <a:pPr indent="0" algn="r">
               <a:buNone/>
             </a:pPr>
-            <a:fld id="{C6D59B0E-6E6C-4C12-9EFA-AB72D21E5DCC}" type="slidenum">
+            <a:fld id="{EE70B9F4-823B-4682-BA78-6FCB939A2BD2}" type="slidenum">
               <a:rPr lang="en-US" sz="1400" b="0" u="none" strike="noStrike">
                 <a:solidFill>
                   <a:srgbClr val="000000"/>
@@ -1101,7 +1103,7 @@
         <p:spPr>
           <a:xfrm>
             <a:off x="685800" y="1143000"/>
-            <a:ext cx="5486040" cy="3085920"/>
+            <a:ext cx="5485680" cy="3085560"/>
           </a:xfrm>
           <a:prstGeom prst="rect">
             <a:avLst/>
@@ -1124,7 +1126,7 @@
         <p:spPr>
           <a:xfrm>
             <a:off x="685800" y="4400640"/>
-            <a:ext cx="5486040" cy="3600000"/>
+            <a:ext cx="5485680" cy="3599640"/>
           </a:xfrm>
           <a:prstGeom prst="rect">
             <a:avLst/>
@@ -1166,7 +1168,7 @@
         <p:spPr>
           <a:xfrm>
             <a:off x="3884760" y="8685360"/>
-            <a:ext cx="2971440" cy="458280"/>
+            <a:ext cx="2971080" cy="457920"/>
           </a:xfrm>
           <a:prstGeom prst="rect">
             <a:avLst/>
@@ -1186,6 +1188,9 @@
                 <a:spcPct val="100000"/>
               </a:lnSpc>
               <a:buNone/>
+              <a:tabLst>
+                <a:tab pos="0" algn="l"/>
+              </a:tabLst>
               <a:defRPr lang="en-US" sz="1200" b="0" u="none" strike="noStrike">
                 <a:solidFill>
                   <a:schemeClr val="dk1"/>
@@ -1203,8 +1208,11 @@
                 <a:spcPct val="100000"/>
               </a:lnSpc>
               <a:buNone/>
+              <a:tabLst>
+                <a:tab pos="0" algn="l"/>
+              </a:tabLst>
             </a:pPr>
-            <a:fld id="{487EFC8C-2C41-49D4-9C77-848D59957138}" type="slidenum">
+            <a:fld id="{975C81B4-5404-41FC-86A9-3932F52A6720}" type="slidenum">
               <a:rPr lang="en-US" sz="1200" b="0" u="none" strike="noStrike">
                 <a:solidFill>
                   <a:schemeClr val="dk1"/>
@@ -1262,7 +1270,7 @@
         <p:spPr>
           <a:xfrm>
             <a:off x="685800" y="1143000"/>
-            <a:ext cx="5486040" cy="3085920"/>
+            <a:ext cx="5485680" cy="3085560"/>
           </a:xfrm>
           <a:prstGeom prst="rect">
             <a:avLst/>
@@ -1285,7 +1293,7 @@
         <p:spPr>
           <a:xfrm>
             <a:off x="685800" y="4400640"/>
-            <a:ext cx="5486040" cy="3600000"/>
+            <a:ext cx="5485680" cy="3599640"/>
           </a:xfrm>
           <a:prstGeom prst="rect">
             <a:avLst/>
@@ -1327,7 +1335,7 @@
         <p:spPr>
           <a:xfrm>
             <a:off x="3884760" y="8685360"/>
-            <a:ext cx="2971440" cy="458280"/>
+            <a:ext cx="2971080" cy="457920"/>
           </a:xfrm>
           <a:prstGeom prst="rect">
             <a:avLst/>
@@ -1347,6 +1355,9 @@
                 <a:spcPct val="100000"/>
               </a:lnSpc>
               <a:buNone/>
+              <a:tabLst>
+                <a:tab pos="0" algn="l"/>
+              </a:tabLst>
               <a:defRPr lang="en-US" sz="1200" b="0" u="none" strike="noStrike">
                 <a:solidFill>
                   <a:schemeClr val="dk1"/>
@@ -1364,8 +1375,11 @@
                 <a:spcPct val="100000"/>
               </a:lnSpc>
               <a:buNone/>
+              <a:tabLst>
+                <a:tab pos="0" algn="l"/>
+              </a:tabLst>
             </a:pPr>
-            <a:fld id="{9BD31692-6E3D-428A-A2A9-F0CD9897F532}" type="slidenum">
+            <a:fld id="{080E9417-EF54-4081-AD40-35E9D7562379}" type="slidenum">
               <a:rPr lang="en-US" sz="1200" b="0" u="none" strike="noStrike">
                 <a:solidFill>
                   <a:schemeClr val="dk1"/>
@@ -1423,7 +1437,7 @@
         <p:spPr>
           <a:xfrm>
             <a:off x="685800" y="1143000"/>
-            <a:ext cx="5486040" cy="3085920"/>
+            <a:ext cx="5485680" cy="3085560"/>
           </a:xfrm>
           <a:prstGeom prst="rect">
             <a:avLst/>
@@ -1446,7 +1460,7 @@
         <p:spPr>
           <a:xfrm>
             <a:off x="685800" y="4400640"/>
-            <a:ext cx="5486040" cy="3600000"/>
+            <a:ext cx="5485680" cy="3599640"/>
           </a:xfrm>
           <a:prstGeom prst="rect">
             <a:avLst/>
@@ -1488,7 +1502,7 @@
         <p:spPr>
           <a:xfrm>
             <a:off x="3884760" y="8685360"/>
-            <a:ext cx="2971440" cy="458280"/>
+            <a:ext cx="2971080" cy="457920"/>
           </a:xfrm>
           <a:prstGeom prst="rect">
             <a:avLst/>
@@ -1508,6 +1522,9 @@
                 <a:spcPct val="100000"/>
               </a:lnSpc>
               <a:buNone/>
+              <a:tabLst>
+                <a:tab pos="0" algn="l"/>
+              </a:tabLst>
               <a:defRPr lang="en-US" sz="1200" b="0" u="none" strike="noStrike">
                 <a:solidFill>
                   <a:schemeClr val="dk1"/>
@@ -1525,8 +1542,11 @@
                 <a:spcPct val="100000"/>
               </a:lnSpc>
               <a:buNone/>
+              <a:tabLst>
+                <a:tab pos="0" algn="l"/>
+              </a:tabLst>
             </a:pPr>
-            <a:fld id="{B0BA68FC-B7C9-4BF7-88DC-5DC31F3E6552}" type="slidenum">
+            <a:fld id="{3C9BD83C-1775-4851-9326-99BD26F2E632}" type="slidenum">
               <a:rPr lang="en-US" sz="1200" b="0" u="none" strike="noStrike">
                 <a:solidFill>
                   <a:schemeClr val="dk1"/>
@@ -1584,7 +1604,7 @@
         <p:spPr>
           <a:xfrm>
             <a:off x="685800" y="1143000"/>
-            <a:ext cx="5486040" cy="3085920"/>
+            <a:ext cx="5485680" cy="3085560"/>
           </a:xfrm>
           <a:prstGeom prst="rect">
             <a:avLst/>
@@ -1607,7 +1627,7 @@
         <p:spPr>
           <a:xfrm>
             <a:off x="685800" y="4400640"/>
-            <a:ext cx="5486040" cy="3600000"/>
+            <a:ext cx="5485680" cy="3599640"/>
           </a:xfrm>
           <a:prstGeom prst="rect">
             <a:avLst/>
@@ -1649,7 +1669,7 @@
         <p:spPr>
           <a:xfrm>
             <a:off x="3884760" y="8685360"/>
-            <a:ext cx="2971440" cy="458280"/>
+            <a:ext cx="2971080" cy="457920"/>
           </a:xfrm>
           <a:prstGeom prst="rect">
             <a:avLst/>
@@ -1669,6 +1689,9 @@
                 <a:spcPct val="100000"/>
               </a:lnSpc>
               <a:buNone/>
+              <a:tabLst>
+                <a:tab pos="0" algn="l"/>
+              </a:tabLst>
               <a:defRPr lang="en-US" sz="1200" b="0" u="none" strike="noStrike">
                 <a:solidFill>
                   <a:schemeClr val="dk1"/>
@@ -1686,8 +1709,11 @@
                 <a:spcPct val="100000"/>
               </a:lnSpc>
               <a:buNone/>
+              <a:tabLst>
+                <a:tab pos="0" algn="l"/>
+              </a:tabLst>
             </a:pPr>
-            <a:fld id="{6070EFF5-F9BD-4584-AECE-FE49EFA4F3A6}" type="slidenum">
+            <a:fld id="{6BDA57B5-19B6-4C92-8904-B45DF816179A}" type="slidenum">
               <a:rPr lang="en-US" sz="1200" b="0" u="none" strike="noStrike">
                 <a:solidFill>
                   <a:schemeClr val="dk1"/>
@@ -1745,7 +1771,7 @@
         <p:spPr>
           <a:xfrm>
             <a:off x="685800" y="1143000"/>
-            <a:ext cx="5486040" cy="3085920"/>
+            <a:ext cx="5485680" cy="3085560"/>
           </a:xfrm>
           <a:prstGeom prst="rect">
             <a:avLst/>
@@ -1768,7 +1794,7 @@
         <p:spPr>
           <a:xfrm>
             <a:off x="685800" y="4400640"/>
-            <a:ext cx="5486040" cy="3600000"/>
+            <a:ext cx="5485680" cy="3599640"/>
           </a:xfrm>
           <a:prstGeom prst="rect">
             <a:avLst/>
@@ -1810,7 +1836,7 @@
         <p:spPr>
           <a:xfrm>
             <a:off x="3884760" y="8685360"/>
-            <a:ext cx="2971440" cy="458280"/>
+            <a:ext cx="2971080" cy="457920"/>
           </a:xfrm>
           <a:prstGeom prst="rect">
             <a:avLst/>
@@ -1830,6 +1856,9 @@
                 <a:spcPct val="100000"/>
               </a:lnSpc>
               <a:buNone/>
+              <a:tabLst>
+                <a:tab pos="0" algn="l"/>
+              </a:tabLst>
               <a:defRPr lang="en-US" sz="1200" b="0" u="none" strike="noStrike">
                 <a:solidFill>
                   <a:schemeClr val="dk1"/>
@@ -1847,8 +1876,11 @@
                 <a:spcPct val="100000"/>
               </a:lnSpc>
               <a:buNone/>
+              <a:tabLst>
+                <a:tab pos="0" algn="l"/>
+              </a:tabLst>
             </a:pPr>
-            <a:fld id="{C8B780F2-F29A-455A-A6E4-C572CC9C141C}" type="slidenum">
+            <a:fld id="{94EA0876-5EA7-4490-B0DC-C09D5B0B94D6}" type="slidenum">
               <a:rPr lang="en-US" sz="1200" b="0" u="none" strike="noStrike">
                 <a:solidFill>
                   <a:schemeClr val="dk1"/>
@@ -1906,7 +1938,7 @@
         <p:spPr>
           <a:xfrm>
             <a:off x="685800" y="1143000"/>
-            <a:ext cx="5486040" cy="3085920"/>
+            <a:ext cx="5485680" cy="3085560"/>
           </a:xfrm>
           <a:prstGeom prst="rect">
             <a:avLst/>
@@ -1929,7 +1961,7 @@
         <p:spPr>
           <a:xfrm>
             <a:off x="685800" y="4400640"/>
-            <a:ext cx="5486040" cy="3600000"/>
+            <a:ext cx="5485680" cy="3599640"/>
           </a:xfrm>
           <a:prstGeom prst="rect">
             <a:avLst/>
@@ -1971,7 +2003,7 @@
         <p:spPr>
           <a:xfrm>
             <a:off x="3884760" y="8685360"/>
-            <a:ext cx="2971440" cy="458280"/>
+            <a:ext cx="2971080" cy="457920"/>
           </a:xfrm>
           <a:prstGeom prst="rect">
             <a:avLst/>
@@ -1991,6 +2023,9 @@
                 <a:spcPct val="100000"/>
               </a:lnSpc>
               <a:buNone/>
+              <a:tabLst>
+                <a:tab pos="0" algn="l"/>
+              </a:tabLst>
               <a:defRPr lang="en-US" sz="1200" b="0" u="none" strike="noStrike">
                 <a:solidFill>
                   <a:schemeClr val="dk1"/>
@@ -2008,8 +2043,11 @@
                 <a:spcPct val="100000"/>
               </a:lnSpc>
               <a:buNone/>
+              <a:tabLst>
+                <a:tab pos="0" algn="l"/>
+              </a:tabLst>
             </a:pPr>
-            <a:fld id="{4DFB4035-20A3-4EF6-A99D-38D054E4B5C4}" type="slidenum">
+            <a:fld id="{7FAEBDE4-691B-46D1-A104-2E9440C58494}" type="slidenum">
               <a:rPr lang="en-US" sz="1200" b="0" u="none" strike="noStrike">
                 <a:solidFill>
                   <a:schemeClr val="dk1"/>
@@ -2067,7 +2105,7 @@
         <p:spPr>
           <a:xfrm>
             <a:off x="685800" y="1143000"/>
-            <a:ext cx="5486040" cy="3085920"/>
+            <a:ext cx="5485680" cy="3085560"/>
           </a:xfrm>
           <a:prstGeom prst="rect">
             <a:avLst/>
@@ -2090,7 +2128,7 @@
         <p:spPr>
           <a:xfrm>
             <a:off x="685800" y="4400640"/>
-            <a:ext cx="5486040" cy="3600000"/>
+            <a:ext cx="5485680" cy="3599640"/>
           </a:xfrm>
           <a:prstGeom prst="rect">
             <a:avLst/>
@@ -2132,7 +2170,7 @@
         <p:spPr>
           <a:xfrm>
             <a:off x="3884760" y="8685360"/>
-            <a:ext cx="2971440" cy="458280"/>
+            <a:ext cx="2971080" cy="457920"/>
           </a:xfrm>
           <a:prstGeom prst="rect">
             <a:avLst/>
@@ -2152,6 +2190,9 @@
                 <a:spcPct val="100000"/>
               </a:lnSpc>
               <a:buNone/>
+              <a:tabLst>
+                <a:tab pos="0" algn="l"/>
+              </a:tabLst>
               <a:defRPr lang="en-US" sz="1200" b="0" u="none" strike="noStrike">
                 <a:solidFill>
                   <a:schemeClr val="dk1"/>
@@ -2169,8 +2210,11 @@
                 <a:spcPct val="100000"/>
               </a:lnSpc>
               <a:buNone/>
+              <a:tabLst>
+                <a:tab pos="0" algn="l"/>
+              </a:tabLst>
             </a:pPr>
-            <a:fld id="{3A0166F8-9D30-4E7D-815D-FC30050B3ECF}" type="slidenum">
+            <a:fld id="{68133101-21E5-4CB9-89C0-90DB387BA300}" type="slidenum">
               <a:rPr lang="en-US" sz="1200" b="0" u="none" strike="noStrike">
                 <a:solidFill>
                   <a:schemeClr val="dk1"/>
@@ -2228,7 +2272,7 @@
         <p:spPr>
           <a:xfrm>
             <a:off x="685800" y="1143000"/>
-            <a:ext cx="5486040" cy="3085920"/>
+            <a:ext cx="5485680" cy="3085560"/>
           </a:xfrm>
           <a:prstGeom prst="rect">
             <a:avLst/>
@@ -2251,7 +2295,7 @@
         <p:spPr>
           <a:xfrm>
             <a:off x="685800" y="4400640"/>
-            <a:ext cx="5486040" cy="3600000"/>
+            <a:ext cx="5485680" cy="3599640"/>
           </a:xfrm>
           <a:prstGeom prst="rect">
             <a:avLst/>
@@ -2293,7 +2337,7 @@
         <p:spPr>
           <a:xfrm>
             <a:off x="3884760" y="8685360"/>
-            <a:ext cx="2971440" cy="458280"/>
+            <a:ext cx="2971080" cy="457920"/>
           </a:xfrm>
           <a:prstGeom prst="rect">
             <a:avLst/>
@@ -2313,6 +2357,9 @@
                 <a:spcPct val="100000"/>
               </a:lnSpc>
               <a:buNone/>
+              <a:tabLst>
+                <a:tab pos="0" algn="l"/>
+              </a:tabLst>
               <a:defRPr lang="en-US" sz="1200" b="0" u="none" strike="noStrike">
                 <a:solidFill>
                   <a:schemeClr val="dk1"/>
@@ -2330,8 +2377,11 @@
                 <a:spcPct val="100000"/>
               </a:lnSpc>
               <a:buNone/>
+              <a:tabLst>
+                <a:tab pos="0" algn="l"/>
+              </a:tabLst>
             </a:pPr>
-            <a:fld id="{7CED5050-3F15-4EBF-971D-96AF383F78FB}" type="slidenum">
+            <a:fld id="{FBA96F4D-4C0B-4F23-858C-2DB7CE63982D}" type="slidenum">
               <a:rPr lang="en-US" sz="1200" b="0" u="none" strike="noStrike">
                 <a:solidFill>
                   <a:schemeClr val="dk1"/>
@@ -2389,7 +2439,7 @@
         <p:spPr>
           <a:xfrm>
             <a:off x="685800" y="1143000"/>
-            <a:ext cx="5486040" cy="3085920"/>
+            <a:ext cx="5485680" cy="3085560"/>
           </a:xfrm>
           <a:prstGeom prst="rect">
             <a:avLst/>
@@ -2412,7 +2462,7 @@
         <p:spPr>
           <a:xfrm>
             <a:off x="685800" y="4400640"/>
-            <a:ext cx="5486040" cy="3600000"/>
+            <a:ext cx="5485680" cy="3599640"/>
           </a:xfrm>
           <a:prstGeom prst="rect">
             <a:avLst/>
@@ -2454,7 +2504,7 @@
         <p:spPr>
           <a:xfrm>
             <a:off x="3884760" y="8685360"/>
-            <a:ext cx="2971440" cy="458280"/>
+            <a:ext cx="2971080" cy="457920"/>
           </a:xfrm>
           <a:prstGeom prst="rect">
             <a:avLst/>
@@ -2474,6 +2524,9 @@
                 <a:spcPct val="100000"/>
               </a:lnSpc>
               <a:buNone/>
+              <a:tabLst>
+                <a:tab pos="0" algn="l"/>
+              </a:tabLst>
               <a:defRPr lang="en-US" sz="1200" b="0" u="none" strike="noStrike">
                 <a:solidFill>
                   <a:schemeClr val="dk1"/>
@@ -2491,8 +2544,11 @@
                 <a:spcPct val="100000"/>
               </a:lnSpc>
               <a:buNone/>
+              <a:tabLst>
+                <a:tab pos="0" algn="l"/>
+              </a:tabLst>
             </a:pPr>
-            <a:fld id="{8D2FCB10-4FF0-477F-88C5-6715BBF7A1FD}" type="slidenum">
+            <a:fld id="{5F7A0696-0616-40CB-9B7B-6DDBBC28C242}" type="slidenum">
               <a:rPr lang="en-US" sz="1200" b="0" u="none" strike="noStrike">
                 <a:solidFill>
                   <a:schemeClr val="dk1"/>
@@ -2596,6 +2652,9 @@
           <a:lstStyle>
             <a:lvl1pPr indent="0" algn="l">
               <a:buNone/>
+              <a:tabLst>
+                <a:tab pos="0" algn="l"/>
+              </a:tabLst>
               <a:defRPr lang="en-US" sz="1800" b="0" u="none" strike="noStrike">
                 <a:solidFill>
                   <a:schemeClr val="dk1"/>
@@ -2609,6 +2668,9 @@
           <a:p>
             <a:pPr indent="0" algn="l">
               <a:buNone/>
+              <a:tabLst>
+                <a:tab pos="0" algn="l"/>
+              </a:tabLst>
             </a:pPr>
             <a:r>
               <a:rPr lang="en-US" sz="1800" b="0" u="none" strike="noStrike">
@@ -2795,7 +2857,7 @@
             </a:lvl7pPr>
           </a:lstStyle>
           <a:p>
-            <a:pPr marL="432000" indent="-324000" algn="l">
+            <a:pPr indent="-324000" algn="l">
               <a:spcBef>
                 <a:spcPts val="1417"/>
               </a:spcBef>
@@ -3062,7 +3124,7 @@
         <p:spPr>
           <a:xfrm>
             <a:off x="9692640" y="-1463040"/>
-            <a:ext cx="4205880" cy="4205880"/>
+            <a:ext cx="4205520" cy="4205520"/>
           </a:xfrm>
           <a:prstGeom prst="ellipse">
             <a:avLst/>
@@ -3105,7 +3167,7 @@
         <p:spPr>
           <a:xfrm>
             <a:off x="10972800" y="3291840"/>
-            <a:ext cx="2742840" cy="2742840"/>
+            <a:ext cx="2742480" cy="2742480"/>
           </a:xfrm>
           <a:prstGeom prst="ellipse">
             <a:avLst/>
@@ -3148,7 +3210,7 @@
         <p:spPr>
           <a:xfrm>
             <a:off x="640080" y="685800"/>
-            <a:ext cx="8229240" cy="319680"/>
+            <a:ext cx="8228880" cy="319320"/>
           </a:xfrm>
           <a:prstGeom prst="rect">
             <a:avLst/>
@@ -3209,7 +3271,7 @@
         <p:spPr>
           <a:xfrm>
             <a:off x="621720" y="1143000"/>
-            <a:ext cx="8686440" cy="1737000"/>
+            <a:ext cx="8686080" cy="1736640"/>
           </a:xfrm>
           <a:prstGeom prst="rect">
             <a:avLst/>
@@ -3300,7 +3362,7 @@
         <p:spPr>
           <a:xfrm>
             <a:off x="640080" y="2971800"/>
-            <a:ext cx="7589160" cy="594000"/>
+            <a:ext cx="7588800" cy="593640"/>
           </a:xfrm>
           <a:prstGeom prst="rect">
             <a:avLst/>
@@ -3361,7 +3423,7 @@
         <p:spPr>
           <a:xfrm>
             <a:off x="640080" y="3977640"/>
-            <a:ext cx="2605680" cy="1416960"/>
+            <a:ext cx="2605320" cy="1416600"/>
           </a:xfrm>
           <a:prstGeom prst="roundRect">
             <a:avLst>
@@ -3409,7 +3471,7 @@
         <p:spPr>
           <a:xfrm>
             <a:off x="640080" y="4142160"/>
-            <a:ext cx="2605680" cy="658080"/>
+            <a:ext cx="2605320" cy="657720"/>
           </a:xfrm>
           <a:prstGeom prst="rect">
             <a:avLst/>
@@ -3470,7 +3532,7 @@
         <p:spPr>
           <a:xfrm>
             <a:off x="777240" y="4846320"/>
-            <a:ext cx="2331360" cy="456840"/>
+            <a:ext cx="2331000" cy="456480"/>
           </a:xfrm>
           <a:prstGeom prst="rect">
             <a:avLst/>
@@ -3531,7 +3593,7 @@
         <p:spPr>
           <a:xfrm>
             <a:off x="3566160" y="3977640"/>
-            <a:ext cx="2605680" cy="1416960"/>
+            <a:ext cx="2605320" cy="1416600"/>
           </a:xfrm>
           <a:prstGeom prst="roundRect">
             <a:avLst>
@@ -3579,7 +3641,7 @@
         <p:spPr>
           <a:xfrm>
             <a:off x="3566160" y="4142160"/>
-            <a:ext cx="2605680" cy="658080"/>
+            <a:ext cx="2605320" cy="657720"/>
           </a:xfrm>
           <a:prstGeom prst="rect">
             <a:avLst/>
@@ -3640,7 +3702,7 @@
         <p:spPr>
           <a:xfrm>
             <a:off x="3703320" y="4846320"/>
-            <a:ext cx="2331360" cy="456840"/>
+            <a:ext cx="2331000" cy="456480"/>
           </a:xfrm>
           <a:prstGeom prst="rect">
             <a:avLst/>
@@ -3701,7 +3763,7 @@
         <p:spPr>
           <a:xfrm>
             <a:off x="6492240" y="3977640"/>
-            <a:ext cx="2605680" cy="1416960"/>
+            <a:ext cx="2605320" cy="1416600"/>
           </a:xfrm>
           <a:prstGeom prst="roundRect">
             <a:avLst>
@@ -3749,7 +3811,7 @@
         <p:spPr>
           <a:xfrm>
             <a:off x="6492240" y="4142160"/>
-            <a:ext cx="2605680" cy="658080"/>
+            <a:ext cx="2605320" cy="657720"/>
           </a:xfrm>
           <a:prstGeom prst="rect">
             <a:avLst/>
@@ -3810,7 +3872,7 @@
         <p:spPr>
           <a:xfrm>
             <a:off x="6629400" y="4846320"/>
-            <a:ext cx="2331360" cy="456840"/>
+            <a:ext cx="2331000" cy="456480"/>
           </a:xfrm>
           <a:prstGeom prst="rect">
             <a:avLst/>
@@ -3871,7 +3933,7 @@
         <p:spPr>
           <a:xfrm>
             <a:off x="640080" y="5806440"/>
-            <a:ext cx="8229240" cy="319680"/>
+            <a:ext cx="11475720" cy="319320"/>
           </a:xfrm>
           <a:prstGeom prst="rect">
             <a:avLst/>
@@ -3912,6 +3974,426 @@
               </a:rPr>
               <a:t>Held-out test set  ·  19,773 encounters  ·  13,998 patients unseen in training</a:t>
             </a:r>
+            <a:r>
+              <a:rPr lang="en-US" sz="1050" b="0" i="1" u="none" strike="noStrike">
+                <a:solidFill>
+                  <a:srgbClr val="8FAAB5"/>
+                </a:solidFill>
+                <a:effectLst/>
+                <a:uFillTx/>
+                <a:latin typeface="Calibri"/>
+                <a:ea typeface="Calibri"/>
+              </a:rPr>
+              <a:t>	</a:t>
+            </a:r>
+            <a:r>
+              <a:rPr lang="en-US" sz="1050" b="0" i="1" u="none" strike="noStrike">
+                <a:solidFill>
+                  <a:srgbClr val="8FAAB5"/>
+                </a:solidFill>
+                <a:effectLst/>
+                <a:uFillTx/>
+                <a:latin typeface="Calibri"/>
+                <a:ea typeface="Calibri"/>
+              </a:rPr>
+              <a:t>	</a:t>
+            </a:r>
+            <a:r>
+              <a:rPr lang="en-US" sz="1050" b="0" i="1" u="none" strike="noStrike">
+                <a:solidFill>
+                  <a:srgbClr val="8FAAB5"/>
+                </a:solidFill>
+                <a:effectLst/>
+                <a:uFillTx/>
+                <a:latin typeface="Calibri"/>
+                <a:ea typeface="Calibri"/>
+              </a:rPr>
+              <a:t>	</a:t>
+            </a:r>
+            <a:r>
+              <a:rPr lang="en-US" sz="1050" b="0" i="1" u="none" strike="noStrike">
+                <a:solidFill>
+                  <a:srgbClr val="8FAAB5"/>
+                </a:solidFill>
+                <a:effectLst/>
+                <a:uFillTx/>
+                <a:latin typeface="Calibri"/>
+                <a:ea typeface="Calibri"/>
+              </a:rPr>
+              <a:t>	</a:t>
+            </a:r>
+            <a:r>
+              <a:rPr lang="en-US" sz="1050" b="0" i="1" u="none" strike="noStrike">
+                <a:solidFill>
+                  <a:srgbClr val="8FAAB5"/>
+                </a:solidFill>
+                <a:effectLst/>
+                <a:uFillTx/>
+                <a:latin typeface="Calibri"/>
+                <a:ea typeface="Calibri"/>
+              </a:rPr>
+              <a:t>	</a:t>
+            </a:r>
+            <a:endParaRPr lang="en-US" sz="1050" b="0" u="none" strike="noStrike">
+              <a:solidFill>
+                <a:srgbClr val="FFFFFF"/>
+              </a:solidFill>
+              <a:effectLst/>
+              <a:uFillTx/>
+              <a:latin typeface="Arial"/>
+            </a:endParaRPr>
+          </a:p>
+          <a:p>
+            <a:pPr defTabSz="914400">
+              <a:lnSpc>
+                <a:spcPct val="100000"/>
+              </a:lnSpc>
+              <a:tabLst>
+                <a:tab pos="0" algn="l"/>
+              </a:tabLst>
+            </a:pPr>
+            <a:endParaRPr lang="en-US" sz="1050" b="0" u="none" strike="noStrike">
+              <a:solidFill>
+                <a:srgbClr val="FFFFFF"/>
+              </a:solidFill>
+              <a:effectLst/>
+              <a:uFillTx/>
+              <a:latin typeface="Arial"/>
+            </a:endParaRPr>
+          </a:p>
+          <a:p>
+            <a:pPr defTabSz="914400">
+              <a:lnSpc>
+                <a:spcPct val="100000"/>
+              </a:lnSpc>
+              <a:tabLst>
+                <a:tab pos="0" algn="l"/>
+              </a:tabLst>
+            </a:pPr>
+            <a:endParaRPr lang="en-US" sz="1050" b="0" u="none" strike="noStrike">
+              <a:solidFill>
+                <a:srgbClr val="FFFFFF"/>
+              </a:solidFill>
+              <a:effectLst/>
+              <a:uFillTx/>
+              <a:latin typeface="Arial"/>
+            </a:endParaRPr>
+          </a:p>
+          <a:p>
+            <a:pPr defTabSz="914400">
+              <a:lnSpc>
+                <a:spcPct val="100000"/>
+              </a:lnSpc>
+              <a:tabLst>
+                <a:tab pos="0" algn="l"/>
+              </a:tabLst>
+            </a:pPr>
+            <a:r>
+              <a:rPr lang="en-US" sz="1050" b="0" i="1" u="none" strike="noStrike">
+                <a:solidFill>
+                  <a:srgbClr val="8FAAB5"/>
+                </a:solidFill>
+                <a:effectLst/>
+                <a:uFillTx/>
+                <a:latin typeface="Calibri"/>
+                <a:ea typeface="Calibri"/>
+              </a:rPr>
+              <a:t>	</a:t>
+            </a:r>
+            <a:r>
+              <a:rPr lang="en-US" sz="1050" b="0" i="1" u="none" strike="noStrike">
+                <a:solidFill>
+                  <a:srgbClr val="8FAAB5"/>
+                </a:solidFill>
+                <a:effectLst/>
+                <a:uFillTx/>
+                <a:latin typeface="Calibri"/>
+                <a:ea typeface="Calibri"/>
+              </a:rPr>
+              <a:t>	</a:t>
+            </a:r>
+            <a:r>
+              <a:rPr lang="en-US" sz="1050" b="0" i="1" u="none" strike="noStrike">
+                <a:solidFill>
+                  <a:srgbClr val="8FAAB5"/>
+                </a:solidFill>
+                <a:effectLst/>
+                <a:uFillTx/>
+                <a:latin typeface="Calibri"/>
+                <a:ea typeface="Calibri"/>
+              </a:rPr>
+              <a:t>	</a:t>
+            </a:r>
+            <a:r>
+              <a:rPr lang="en-US" sz="1050" b="0" i="1" u="none" strike="noStrike">
+                <a:solidFill>
+                  <a:srgbClr val="8FAAB5"/>
+                </a:solidFill>
+                <a:effectLst/>
+                <a:uFillTx/>
+                <a:latin typeface="Calibri"/>
+                <a:ea typeface="Calibri"/>
+              </a:rPr>
+              <a:t>	</a:t>
+            </a:r>
+            <a:r>
+              <a:rPr lang="en-US" sz="1050" b="0" i="1" u="none" strike="noStrike">
+                <a:solidFill>
+                  <a:srgbClr val="8FAAB5"/>
+                </a:solidFill>
+                <a:effectLst/>
+                <a:uFillTx/>
+                <a:latin typeface="Calibri"/>
+                <a:ea typeface="Calibri"/>
+              </a:rPr>
+              <a:t>	</a:t>
+            </a:r>
+            <a:r>
+              <a:rPr lang="en-US" sz="1050" b="0" i="1" u="none" strike="noStrike">
+                <a:solidFill>
+                  <a:srgbClr val="8FAAB5"/>
+                </a:solidFill>
+                <a:effectLst/>
+                <a:uFillTx/>
+                <a:latin typeface="Calibri"/>
+                <a:ea typeface="Calibri"/>
+              </a:rPr>
+              <a:t>	</a:t>
+            </a:r>
+            <a:r>
+              <a:rPr lang="en-US" sz="1050" b="0" i="1" u="none" strike="noStrike">
+                <a:solidFill>
+                  <a:srgbClr val="8FAAB5"/>
+                </a:solidFill>
+                <a:effectLst/>
+                <a:uFillTx/>
+                <a:latin typeface="Calibri"/>
+                <a:ea typeface="Calibri"/>
+              </a:rPr>
+              <a:t>	</a:t>
+            </a:r>
+            <a:r>
+              <a:rPr lang="en-US" sz="1050" b="0" i="1" u="none" strike="noStrike">
+                <a:solidFill>
+                  <a:srgbClr val="8FAAB5"/>
+                </a:solidFill>
+                <a:effectLst/>
+                <a:uFillTx/>
+                <a:latin typeface="Calibri"/>
+                <a:ea typeface="Calibri"/>
+              </a:rPr>
+              <a:t>	</a:t>
+            </a:r>
+            <a:r>
+              <a:rPr lang="en-US" sz="1050" b="0" i="1" u="none" strike="noStrike">
+                <a:solidFill>
+                  <a:srgbClr val="8FAAB5"/>
+                </a:solidFill>
+                <a:effectLst/>
+                <a:uFillTx/>
+                <a:latin typeface="Calibri"/>
+                <a:ea typeface="Calibri"/>
+              </a:rPr>
+              <a:t>	</a:t>
+            </a:r>
+            <a:r>
+              <a:rPr lang="en-US" sz="1050" b="0" i="1" u="none" strike="noStrike">
+                <a:solidFill>
+                  <a:srgbClr val="8FAAB5"/>
+                </a:solidFill>
+                <a:effectLst/>
+                <a:uFillTx/>
+                <a:latin typeface="Calibri"/>
+                <a:ea typeface="Calibri"/>
+              </a:rPr>
+              <a:t>	</a:t>
+            </a:r>
+            <a:r>
+              <a:rPr lang="en-US" sz="1050" b="0" i="1" u="none" strike="noStrike">
+                <a:solidFill>
+                  <a:srgbClr val="8FAAB5"/>
+                </a:solidFill>
+                <a:effectLst/>
+                <a:uFillTx/>
+                <a:latin typeface="Calibri"/>
+                <a:ea typeface="Calibri"/>
+              </a:rPr>
+              <a:t>	</a:t>
+            </a:r>
+            <a:r>
+              <a:rPr lang="en-US" sz="1050" b="0" i="1" u="none" strike="noStrike">
+                <a:solidFill>
+                  <a:srgbClr val="8FAAB5"/>
+                </a:solidFill>
+                <a:effectLst/>
+                <a:uFillTx/>
+                <a:latin typeface="Calibri"/>
+                <a:ea typeface="Calibri"/>
+              </a:rPr>
+              <a:t>By – Shikhar Goel,</a:t>
+            </a:r>
+            <a:endParaRPr lang="en-US" sz="1050" b="0" u="none" strike="noStrike">
+              <a:solidFill>
+                <a:srgbClr val="FFFFFF"/>
+              </a:solidFill>
+              <a:effectLst/>
+              <a:uFillTx/>
+              <a:latin typeface="Arial"/>
+            </a:endParaRPr>
+          </a:p>
+          <a:p>
+            <a:pPr defTabSz="914400">
+              <a:lnSpc>
+                <a:spcPct val="100000"/>
+              </a:lnSpc>
+              <a:tabLst>
+                <a:tab pos="0" algn="l"/>
+              </a:tabLst>
+            </a:pPr>
+            <a:r>
+              <a:rPr lang="en-US" sz="1050" b="0" i="1" u="none" strike="noStrike">
+                <a:solidFill>
+                  <a:srgbClr val="8FAAB5"/>
+                </a:solidFill>
+                <a:effectLst/>
+                <a:uFillTx/>
+                <a:latin typeface="Calibri"/>
+                <a:ea typeface="Calibri"/>
+              </a:rPr>
+              <a:t>	</a:t>
+            </a:r>
+            <a:r>
+              <a:rPr lang="en-US" sz="1050" b="0" i="1" u="none" strike="noStrike">
+                <a:solidFill>
+                  <a:srgbClr val="8FAAB5"/>
+                </a:solidFill>
+                <a:effectLst/>
+                <a:uFillTx/>
+                <a:latin typeface="Calibri"/>
+                <a:ea typeface="Calibri"/>
+              </a:rPr>
+              <a:t>	</a:t>
+            </a:r>
+            <a:r>
+              <a:rPr lang="en-US" sz="1050" b="0" i="1" u="none" strike="noStrike">
+                <a:solidFill>
+                  <a:srgbClr val="8FAAB5"/>
+                </a:solidFill>
+                <a:effectLst/>
+                <a:uFillTx/>
+                <a:latin typeface="Calibri"/>
+                <a:ea typeface="Calibri"/>
+              </a:rPr>
+              <a:t>	</a:t>
+            </a:r>
+            <a:r>
+              <a:rPr lang="en-US" sz="1050" b="0" i="1" u="none" strike="noStrike">
+                <a:solidFill>
+                  <a:srgbClr val="8FAAB5"/>
+                </a:solidFill>
+                <a:effectLst/>
+                <a:uFillTx/>
+                <a:latin typeface="Calibri"/>
+                <a:ea typeface="Calibri"/>
+              </a:rPr>
+              <a:t>	</a:t>
+            </a:r>
+            <a:r>
+              <a:rPr lang="en-US" sz="1050" b="0" i="1" u="none" strike="noStrike">
+                <a:solidFill>
+                  <a:srgbClr val="8FAAB5"/>
+                </a:solidFill>
+                <a:effectLst/>
+                <a:uFillTx/>
+                <a:latin typeface="Calibri"/>
+                <a:ea typeface="Calibri"/>
+              </a:rPr>
+              <a:t>	</a:t>
+            </a:r>
+            <a:r>
+              <a:rPr lang="en-US" sz="1050" b="0" i="1" u="none" strike="noStrike">
+                <a:solidFill>
+                  <a:srgbClr val="8FAAB5"/>
+                </a:solidFill>
+                <a:effectLst/>
+                <a:uFillTx/>
+                <a:latin typeface="Calibri"/>
+                <a:ea typeface="Calibri"/>
+              </a:rPr>
+              <a:t>	</a:t>
+            </a:r>
+            <a:r>
+              <a:rPr lang="en-US" sz="1050" b="0" i="1" u="none" strike="noStrike">
+                <a:solidFill>
+                  <a:srgbClr val="8FAAB5"/>
+                </a:solidFill>
+                <a:effectLst/>
+                <a:uFillTx/>
+                <a:latin typeface="Calibri"/>
+                <a:ea typeface="Calibri"/>
+              </a:rPr>
+              <a:t>	</a:t>
+            </a:r>
+            <a:r>
+              <a:rPr lang="en-US" sz="1050" b="0" i="1" u="none" strike="noStrike">
+                <a:solidFill>
+                  <a:srgbClr val="8FAAB5"/>
+                </a:solidFill>
+                <a:effectLst/>
+                <a:uFillTx/>
+                <a:latin typeface="Calibri"/>
+                <a:ea typeface="Calibri"/>
+              </a:rPr>
+              <a:t>	</a:t>
+            </a:r>
+            <a:r>
+              <a:rPr lang="en-US" sz="1050" b="0" i="1" u="none" strike="noStrike">
+                <a:solidFill>
+                  <a:srgbClr val="8FAAB5"/>
+                </a:solidFill>
+                <a:effectLst/>
+                <a:uFillTx/>
+                <a:latin typeface="Calibri"/>
+                <a:ea typeface="Calibri"/>
+              </a:rPr>
+              <a:t>	</a:t>
+            </a:r>
+            <a:r>
+              <a:rPr lang="en-US" sz="1050" b="0" i="1" u="none" strike="noStrike">
+                <a:solidFill>
+                  <a:srgbClr val="8FAAB5"/>
+                </a:solidFill>
+                <a:effectLst/>
+                <a:uFillTx/>
+                <a:latin typeface="Calibri"/>
+                <a:ea typeface="Calibri"/>
+              </a:rPr>
+              <a:t>	</a:t>
+            </a:r>
+            <a:r>
+              <a:rPr lang="en-US" sz="1050" b="0" i="1" u="none" strike="noStrike">
+                <a:solidFill>
+                  <a:srgbClr val="8FAAB5"/>
+                </a:solidFill>
+                <a:effectLst/>
+                <a:uFillTx/>
+                <a:latin typeface="Calibri"/>
+                <a:ea typeface="Calibri"/>
+              </a:rPr>
+              <a:t>	</a:t>
+            </a:r>
+            <a:r>
+              <a:rPr lang="en-US" sz="1050" b="0" i="1" u="none" strike="noStrike">
+                <a:solidFill>
+                  <a:srgbClr val="8FAAB5"/>
+                </a:solidFill>
+                <a:effectLst/>
+                <a:uFillTx/>
+                <a:latin typeface="Calibri"/>
+                <a:ea typeface="Calibri"/>
+              </a:rPr>
+              <a:t>Ishpreet Singh</a:t>
+            </a:r>
             <a:endParaRPr lang="en-US" sz="1050" b="0" u="none" strike="noStrike">
               <a:solidFill>
                 <a:srgbClr val="FFFFFF"/>
@@ -3932,7 +4414,7 @@
         <p:spPr>
           <a:xfrm>
             <a:off x="11597400" y="6492240"/>
-            <a:ext cx="365400" cy="255600"/>
+            <a:ext cx="365040" cy="255240"/>
           </a:xfrm>
           <a:prstGeom prst="rect">
             <a:avLst/>
@@ -4030,7 +4512,7 @@
         <p:spPr>
           <a:xfrm>
             <a:off x="502920" y="384120"/>
-            <a:ext cx="5486040" cy="255600"/>
+            <a:ext cx="5485680" cy="255240"/>
           </a:xfrm>
           <a:prstGeom prst="rect">
             <a:avLst/>
@@ -4091,7 +4573,7 @@
         <p:spPr>
           <a:xfrm>
             <a:off x="502920" y="658440"/>
-            <a:ext cx="11155320" cy="566640"/>
+            <a:ext cx="11154960" cy="566280"/>
           </a:xfrm>
           <a:prstGeom prst="rect">
             <a:avLst/>
@@ -4152,7 +4634,7 @@
         <p:spPr>
           <a:xfrm>
             <a:off x="502920" y="1481400"/>
-            <a:ext cx="5988960" cy="914040"/>
+            <a:ext cx="5988600" cy="913680"/>
           </a:xfrm>
           <a:prstGeom prst="roundRect">
             <a:avLst>
@@ -4200,7 +4682,7 @@
         <p:spPr>
           <a:xfrm>
             <a:off x="731520" y="1481400"/>
-            <a:ext cx="5531760" cy="914040"/>
+            <a:ext cx="5531400" cy="913680"/>
           </a:xfrm>
           <a:prstGeom prst="rect">
             <a:avLst/>
@@ -4261,7 +4743,7 @@
         <p:spPr>
           <a:xfrm>
             <a:off x="502920" y="2606040"/>
-            <a:ext cx="5988960" cy="2148480"/>
+            <a:ext cx="5988600" cy="2148120"/>
           </a:xfrm>
           <a:prstGeom prst="rect">
             <a:avLst/>
@@ -4397,7 +4879,7 @@
         <p:spPr>
           <a:xfrm>
             <a:off x="502920" y="4892040"/>
-            <a:ext cx="5988960" cy="868320"/>
+            <a:ext cx="5988600" cy="867960"/>
           </a:xfrm>
           <a:prstGeom prst="roundRect">
             <a:avLst>
@@ -4442,7 +4924,7 @@
         <p:spPr>
           <a:xfrm>
             <a:off x="731520" y="4892040"/>
-            <a:ext cx="5531760" cy="868320"/>
+            <a:ext cx="5531400" cy="867960"/>
           </a:xfrm>
           <a:prstGeom prst="rect">
             <a:avLst/>
@@ -4515,7 +4997,7 @@
         <p:spPr>
           <a:xfrm>
             <a:off x="6720840" y="1481400"/>
-            <a:ext cx="4983120" cy="4278960"/>
+            <a:ext cx="4982760" cy="4278600"/>
           </a:xfrm>
           <a:prstGeom prst="roundRect">
             <a:avLst>
@@ -4563,7 +5045,7 @@
         <p:spPr>
           <a:xfrm>
             <a:off x="6995160" y="1691640"/>
-            <a:ext cx="4434480" cy="255600"/>
+            <a:ext cx="4434120" cy="255240"/>
           </a:xfrm>
           <a:prstGeom prst="rect">
             <a:avLst/>
@@ -4624,7 +5106,7 @@
         <p:spPr>
           <a:xfrm>
             <a:off x="6995160" y="1938600"/>
-            <a:ext cx="4434480" cy="365400"/>
+            <a:ext cx="4434120" cy="365040"/>
           </a:xfrm>
           <a:prstGeom prst="rect">
             <a:avLst/>
@@ -4685,7 +5167,7 @@
         <p:spPr>
           <a:xfrm>
             <a:off x="6995160" y="2286000"/>
-            <a:ext cx="4434480" cy="273960"/>
+            <a:ext cx="4434120" cy="273600"/>
           </a:xfrm>
           <a:prstGeom prst="rect">
             <a:avLst/>
@@ -4746,7 +5228,7 @@
         <p:spPr>
           <a:xfrm>
             <a:off x="6995160" y="2743200"/>
-            <a:ext cx="2080080" cy="868320"/>
+            <a:ext cx="2079720" cy="867960"/>
           </a:xfrm>
           <a:prstGeom prst="roundRect">
             <a:avLst>
@@ -4794,7 +5276,7 @@
         <p:spPr>
           <a:xfrm>
             <a:off x="6995160" y="2834640"/>
-            <a:ext cx="2080080" cy="411120"/>
+            <a:ext cx="2079720" cy="410760"/>
           </a:xfrm>
           <a:prstGeom prst="rect">
             <a:avLst/>
@@ -4855,7 +5337,7 @@
         <p:spPr>
           <a:xfrm>
             <a:off x="7086600" y="3246120"/>
-            <a:ext cx="1897200" cy="319680"/>
+            <a:ext cx="1896840" cy="319320"/>
           </a:xfrm>
           <a:prstGeom prst="rect">
             <a:avLst/>
@@ -4916,7 +5398,7 @@
         <p:spPr>
           <a:xfrm>
             <a:off x="9349920" y="2743200"/>
-            <a:ext cx="2080080" cy="868320"/>
+            <a:ext cx="2079720" cy="867960"/>
           </a:xfrm>
           <a:prstGeom prst="roundRect">
             <a:avLst>
@@ -4964,7 +5446,7 @@
         <p:spPr>
           <a:xfrm>
             <a:off x="9349920" y="2834640"/>
-            <a:ext cx="2080080" cy="411120"/>
+            <a:ext cx="2079720" cy="410760"/>
           </a:xfrm>
           <a:prstGeom prst="rect">
             <a:avLst/>
@@ -5025,7 +5507,7 @@
         <p:spPr>
           <a:xfrm>
             <a:off x="9441360" y="3246120"/>
-            <a:ext cx="1897200" cy="319680"/>
+            <a:ext cx="1896840" cy="319320"/>
           </a:xfrm>
           <a:prstGeom prst="rect">
             <a:avLst/>
@@ -5086,7 +5568,7 @@
         <p:spPr>
           <a:xfrm>
             <a:off x="6995160" y="3840480"/>
-            <a:ext cx="2080080" cy="868320"/>
+            <a:ext cx="2079720" cy="867960"/>
           </a:xfrm>
           <a:prstGeom prst="roundRect">
             <a:avLst>
@@ -5134,7 +5616,7 @@
         <p:spPr>
           <a:xfrm>
             <a:off x="6995160" y="3931920"/>
-            <a:ext cx="2080080" cy="411120"/>
+            <a:ext cx="2079720" cy="410760"/>
           </a:xfrm>
           <a:prstGeom prst="rect">
             <a:avLst/>
@@ -5195,7 +5677,7 @@
         <p:spPr>
           <a:xfrm>
             <a:off x="7086600" y="4343400"/>
-            <a:ext cx="1897200" cy="319680"/>
+            <a:ext cx="1896840" cy="319320"/>
           </a:xfrm>
           <a:prstGeom prst="rect">
             <a:avLst/>
@@ -5256,7 +5738,7 @@
         <p:spPr>
           <a:xfrm>
             <a:off x="9349920" y="3840480"/>
-            <a:ext cx="2080080" cy="868320"/>
+            <a:ext cx="2079720" cy="867960"/>
           </a:xfrm>
           <a:prstGeom prst="roundRect">
             <a:avLst>
@@ -5304,7 +5786,7 @@
         <p:spPr>
           <a:xfrm>
             <a:off x="9349920" y="3931920"/>
-            <a:ext cx="2080080" cy="411120"/>
+            <a:ext cx="2079720" cy="410760"/>
           </a:xfrm>
           <a:prstGeom prst="rect">
             <a:avLst/>
@@ -5365,7 +5847,7 @@
         <p:spPr>
           <a:xfrm>
             <a:off x="9441360" y="4343400"/>
-            <a:ext cx="1897200" cy="319680"/>
+            <a:ext cx="1896840" cy="319320"/>
           </a:xfrm>
           <a:prstGeom prst="rect">
             <a:avLst/>
@@ -5426,7 +5908,7 @@
         <p:spPr>
           <a:xfrm>
             <a:off x="6995160" y="4892040"/>
-            <a:ext cx="4434480" cy="776880"/>
+            <a:ext cx="4434120" cy="776520"/>
           </a:xfrm>
           <a:prstGeom prst="rect">
             <a:avLst/>
@@ -5547,7 +6029,7 @@
         <p:spPr>
           <a:xfrm>
             <a:off x="11597400" y="6492240"/>
-            <a:ext cx="365400" cy="255600"/>
+            <a:ext cx="365040" cy="255240"/>
           </a:xfrm>
           <a:prstGeom prst="rect">
             <a:avLst/>
@@ -5645,7 +6127,7 @@
         <p:spPr>
           <a:xfrm>
             <a:off x="502920" y="384120"/>
-            <a:ext cx="5486040" cy="255600"/>
+            <a:ext cx="5485680" cy="255240"/>
           </a:xfrm>
           <a:prstGeom prst="rect">
             <a:avLst/>
@@ -5706,7 +6188,7 @@
         <p:spPr>
           <a:xfrm>
             <a:off x="502920" y="658440"/>
-            <a:ext cx="11155320" cy="566640"/>
+            <a:ext cx="11154960" cy="566280"/>
           </a:xfrm>
           <a:prstGeom prst="rect">
             <a:avLst/>
@@ -5767,7 +6249,7 @@
         <p:spPr>
           <a:xfrm>
             <a:off x="502920" y="1536120"/>
-            <a:ext cx="1943640" cy="1737000"/>
+            <a:ext cx="1943280" cy="1736640"/>
           </a:xfrm>
           <a:prstGeom prst="roundRect">
             <a:avLst>
@@ -5815,7 +6297,7 @@
         <p:spPr>
           <a:xfrm>
             <a:off x="667440" y="1700640"/>
-            <a:ext cx="328680" cy="328680"/>
+            <a:ext cx="328320" cy="328320"/>
           </a:xfrm>
           <a:prstGeom prst="ellipse">
             <a:avLst/>
@@ -5858,7 +6340,7 @@
         <p:spPr>
           <a:xfrm>
             <a:off x="667440" y="1700640"/>
-            <a:ext cx="328680" cy="328680"/>
+            <a:ext cx="328320" cy="328320"/>
           </a:xfrm>
           <a:prstGeom prst="rect">
             <a:avLst/>
@@ -5919,7 +6401,7 @@
         <p:spPr>
           <a:xfrm>
             <a:off x="667440" y="2103120"/>
-            <a:ext cx="1614600" cy="310680"/>
+            <a:ext cx="1614240" cy="310320"/>
           </a:xfrm>
           <a:prstGeom prst="rect">
             <a:avLst/>
@@ -5980,7 +6462,7 @@
         <p:spPr>
           <a:xfrm>
             <a:off x="667440" y="2432160"/>
-            <a:ext cx="1614600" cy="749520"/>
+            <a:ext cx="1614240" cy="749160"/>
           </a:xfrm>
           <a:prstGeom prst="rect">
             <a:avLst/>
@@ -6041,7 +6523,7 @@
         <p:spPr>
           <a:xfrm>
             <a:off x="2812680" y="1536120"/>
-            <a:ext cx="1943640" cy="1737000"/>
+            <a:ext cx="1943280" cy="1736640"/>
           </a:xfrm>
           <a:prstGeom prst="roundRect">
             <a:avLst>
@@ -6089,7 +6571,7 @@
         <p:spPr>
           <a:xfrm>
             <a:off x="2977200" y="1700640"/>
-            <a:ext cx="328680" cy="328680"/>
+            <a:ext cx="328320" cy="328320"/>
           </a:xfrm>
           <a:prstGeom prst="ellipse">
             <a:avLst/>
@@ -6132,7 +6614,7 @@
         <p:spPr>
           <a:xfrm>
             <a:off x="2977200" y="1700640"/>
-            <a:ext cx="328680" cy="328680"/>
+            <a:ext cx="328320" cy="328320"/>
           </a:xfrm>
           <a:prstGeom prst="rect">
             <a:avLst/>
@@ -6193,7 +6675,7 @@
         <p:spPr>
           <a:xfrm>
             <a:off x="2977200" y="2103120"/>
-            <a:ext cx="1614600" cy="310680"/>
+            <a:ext cx="1614240" cy="310320"/>
           </a:xfrm>
           <a:prstGeom prst="rect">
             <a:avLst/>
@@ -6254,7 +6736,7 @@
         <p:spPr>
           <a:xfrm>
             <a:off x="2977200" y="2432160"/>
-            <a:ext cx="1614600" cy="749520"/>
+            <a:ext cx="1614240" cy="749160"/>
           </a:xfrm>
           <a:prstGeom prst="rect">
             <a:avLst/>
@@ -6315,7 +6797,7 @@
         <p:spPr>
           <a:xfrm>
             <a:off x="5122440" y="1536120"/>
-            <a:ext cx="1943640" cy="1737000"/>
+            <a:ext cx="1943280" cy="1736640"/>
           </a:xfrm>
           <a:prstGeom prst="roundRect">
             <a:avLst>
@@ -6363,7 +6845,7 @@
         <p:spPr>
           <a:xfrm>
             <a:off x="5286960" y="1700640"/>
-            <a:ext cx="328680" cy="328680"/>
+            <a:ext cx="328320" cy="328320"/>
           </a:xfrm>
           <a:prstGeom prst="ellipse">
             <a:avLst/>
@@ -6406,7 +6888,7 @@
         <p:spPr>
           <a:xfrm>
             <a:off x="5286960" y="1700640"/>
-            <a:ext cx="328680" cy="328680"/>
+            <a:ext cx="328320" cy="328320"/>
           </a:xfrm>
           <a:prstGeom prst="rect">
             <a:avLst/>
@@ -6467,7 +6949,7 @@
         <p:spPr>
           <a:xfrm>
             <a:off x="5286960" y="2103120"/>
-            <a:ext cx="1614600" cy="310680"/>
+            <a:ext cx="1614240" cy="310320"/>
           </a:xfrm>
           <a:prstGeom prst="rect">
             <a:avLst/>
@@ -6528,7 +7010,7 @@
         <p:spPr>
           <a:xfrm>
             <a:off x="5286960" y="2432160"/>
-            <a:ext cx="1614600" cy="749520"/>
+            <a:ext cx="1614240" cy="749160"/>
           </a:xfrm>
           <a:prstGeom prst="rect">
             <a:avLst/>
@@ -6589,7 +7071,7 @@
         <p:spPr>
           <a:xfrm>
             <a:off x="7432200" y="1536120"/>
-            <a:ext cx="1943640" cy="1737000"/>
+            <a:ext cx="1943280" cy="1736640"/>
           </a:xfrm>
           <a:prstGeom prst="roundRect">
             <a:avLst>
@@ -6637,7 +7119,7 @@
         <p:spPr>
           <a:xfrm>
             <a:off x="7596720" y="1700640"/>
-            <a:ext cx="328680" cy="328680"/>
+            <a:ext cx="328320" cy="328320"/>
           </a:xfrm>
           <a:prstGeom prst="ellipse">
             <a:avLst/>
@@ -6680,7 +7162,7 @@
         <p:spPr>
           <a:xfrm>
             <a:off x="7596720" y="1700640"/>
-            <a:ext cx="328680" cy="328680"/>
+            <a:ext cx="328320" cy="328320"/>
           </a:xfrm>
           <a:prstGeom prst="rect">
             <a:avLst/>
@@ -6741,7 +7223,7 @@
         <p:spPr>
           <a:xfrm>
             <a:off x="7596720" y="2103120"/>
-            <a:ext cx="1614600" cy="310680"/>
+            <a:ext cx="1614240" cy="310320"/>
           </a:xfrm>
           <a:prstGeom prst="rect">
             <a:avLst/>
@@ -6802,7 +7284,7 @@
         <p:spPr>
           <a:xfrm>
             <a:off x="7596720" y="2432160"/>
-            <a:ext cx="1614600" cy="749520"/>
+            <a:ext cx="1614240" cy="749160"/>
           </a:xfrm>
           <a:prstGeom prst="rect">
             <a:avLst/>
@@ -6863,7 +7345,7 @@
         <p:spPr>
           <a:xfrm>
             <a:off x="9741960" y="1536120"/>
-            <a:ext cx="1943640" cy="1737000"/>
+            <a:ext cx="1943280" cy="1736640"/>
           </a:xfrm>
           <a:prstGeom prst="roundRect">
             <a:avLst>
@@ -6911,7 +7393,7 @@
         <p:spPr>
           <a:xfrm>
             <a:off x="9906480" y="1700640"/>
-            <a:ext cx="328680" cy="328680"/>
+            <a:ext cx="328320" cy="328320"/>
           </a:xfrm>
           <a:prstGeom prst="ellipse">
             <a:avLst/>
@@ -6954,7 +7436,7 @@
         <p:spPr>
           <a:xfrm>
             <a:off x="9906480" y="1700640"/>
-            <a:ext cx="328680" cy="328680"/>
+            <a:ext cx="328320" cy="328320"/>
           </a:xfrm>
           <a:prstGeom prst="rect">
             <a:avLst/>
@@ -7015,7 +7497,7 @@
         <p:spPr>
           <a:xfrm>
             <a:off x="9906480" y="2103120"/>
-            <a:ext cx="1614600" cy="310680"/>
+            <a:ext cx="1614240" cy="310320"/>
           </a:xfrm>
           <a:prstGeom prst="rect">
             <a:avLst/>
@@ -7076,7 +7558,7 @@
         <p:spPr>
           <a:xfrm>
             <a:off x="9906480" y="2432160"/>
-            <a:ext cx="1614600" cy="749520"/>
+            <a:ext cx="1614240" cy="749160"/>
           </a:xfrm>
           <a:prstGeom prst="rect">
             <a:avLst/>
@@ -7137,7 +7619,7 @@
         <p:spPr>
           <a:xfrm>
             <a:off x="502920" y="3364920"/>
-            <a:ext cx="11182680" cy="292320"/>
+            <a:ext cx="11182320" cy="291960"/>
           </a:xfrm>
           <a:prstGeom prst="rect">
             <a:avLst/>
@@ -7210,7 +7692,7 @@
         <p:spPr>
           <a:xfrm>
             <a:off x="502920" y="3822120"/>
-            <a:ext cx="5486040" cy="255600"/>
+            <a:ext cx="5485680" cy="255240"/>
           </a:xfrm>
           <a:prstGeom prst="rect">
             <a:avLst/>
@@ -7271,7 +7753,7 @@
         <p:spPr>
           <a:xfrm>
             <a:off x="502920" y="4060080"/>
-            <a:ext cx="11155320" cy="310680"/>
+            <a:ext cx="11154960" cy="310320"/>
           </a:xfrm>
           <a:prstGeom prst="rect">
             <a:avLst/>
@@ -7332,7 +7814,7 @@
         <p:spPr>
           <a:xfrm>
             <a:off x="502920" y="4480560"/>
-            <a:ext cx="5440320" cy="1051200"/>
+            <a:ext cx="5439960" cy="1050840"/>
           </a:xfrm>
           <a:prstGeom prst="roundRect">
             <a:avLst>
@@ -7380,7 +7862,7 @@
         <p:spPr>
           <a:xfrm>
             <a:off x="731520" y="4480560"/>
-            <a:ext cx="4983120" cy="1051200"/>
+            <a:ext cx="4982760" cy="1050840"/>
           </a:xfrm>
           <a:prstGeom prst="rect">
             <a:avLst/>
@@ -7401,6 +7883,11 @@
             <a:noAutofit/>
           </a:bodyPr>
           <a:p>
+            <a:pPr>
+              <a:lnSpc>
+                <a:spcPct val="100000"/>
+              </a:lnSpc>
+            </a:pPr>
             <a:r>
               <a:rPr lang="en-US" sz="1300" b="1" u="none" strike="noStrike">
                 <a:solidFill>
@@ -7475,7 +7962,7 @@
         <p:spPr>
           <a:xfrm>
             <a:off x="6217920" y="4480560"/>
-            <a:ext cx="5440320" cy="1051200"/>
+            <a:ext cx="5439960" cy="1050840"/>
           </a:xfrm>
           <a:prstGeom prst="roundRect">
             <a:avLst>
@@ -7523,7 +8010,7 @@
         <p:spPr>
           <a:xfrm>
             <a:off x="6446520" y="4480560"/>
-            <a:ext cx="4983120" cy="1051200"/>
+            <a:ext cx="4982760" cy="1050840"/>
           </a:xfrm>
           <a:prstGeom prst="rect">
             <a:avLst/>
@@ -7544,6 +8031,11 @@
             <a:noAutofit/>
           </a:bodyPr>
           <a:p>
+            <a:pPr>
+              <a:lnSpc>
+                <a:spcPct val="100000"/>
+              </a:lnSpc>
+            </a:pPr>
             <a:r>
               <a:rPr lang="en-US" sz="1300" b="1" u="none" strike="noStrike">
                 <a:solidFill>
@@ -7618,7 +8110,7 @@
         <p:spPr>
           <a:xfrm>
             <a:off x="502920" y="5669280"/>
-            <a:ext cx="11182680" cy="566640"/>
+            <a:ext cx="11182320" cy="566280"/>
           </a:xfrm>
           <a:prstGeom prst="roundRect">
             <a:avLst>
@@ -7663,7 +8155,7 @@
         <p:spPr>
           <a:xfrm>
             <a:off x="777240" y="5669280"/>
-            <a:ext cx="10606680" cy="566640"/>
+            <a:ext cx="10606320" cy="566280"/>
           </a:xfrm>
           <a:prstGeom prst="rect">
             <a:avLst/>
@@ -7736,7 +8228,7 @@
         <p:spPr>
           <a:xfrm>
             <a:off x="11597400" y="6492240"/>
-            <a:ext cx="365400" cy="255600"/>
+            <a:ext cx="365040" cy="255240"/>
           </a:xfrm>
           <a:prstGeom prst="rect">
             <a:avLst/>
@@ -7834,7 +8326,7 @@
         <p:spPr>
           <a:xfrm>
             <a:off x="502920" y="384120"/>
-            <a:ext cx="5486040" cy="255600"/>
+            <a:ext cx="5485680" cy="255240"/>
           </a:xfrm>
           <a:prstGeom prst="rect">
             <a:avLst/>
@@ -7895,7 +8387,7 @@
         <p:spPr>
           <a:xfrm>
             <a:off x="502920" y="658440"/>
-            <a:ext cx="11155320" cy="566640"/>
+            <a:ext cx="11154960" cy="566280"/>
           </a:xfrm>
           <a:prstGeom prst="rect">
             <a:avLst/>
@@ -7956,7 +8448,7 @@
         <p:spPr>
           <a:xfrm>
             <a:off x="502920" y="1207080"/>
-            <a:ext cx="11155320" cy="273960"/>
+            <a:ext cx="11154960" cy="273600"/>
           </a:xfrm>
           <a:prstGeom prst="rect">
             <a:avLst/>
@@ -8017,7 +8509,7 @@
         <p:spPr>
           <a:xfrm>
             <a:off x="502920" y="1627560"/>
-            <a:ext cx="5577480" cy="273960"/>
+            <a:ext cx="5577120" cy="273600"/>
           </a:xfrm>
           <a:prstGeom prst="rect">
             <a:avLst/>
@@ -8077,7 +8569,7 @@
         </p:nvGraphicFramePr>
         <p:xfrm>
           <a:off x="502920" y="1938600"/>
-          <a:ext cx="5577480" cy="2331360"/>
+          <a:ext cx="5577120" cy="2331000"/>
         </p:xfrm>
         <a:graphic>
           <a:graphicData uri="http://schemas.openxmlformats.org/drawingml/2006/chart">
@@ -8094,7 +8586,7 @@
         <p:spPr>
           <a:xfrm>
             <a:off x="502920" y="4316040"/>
-            <a:ext cx="5577480" cy="365400"/>
+            <a:ext cx="5577120" cy="365040"/>
           </a:xfrm>
           <a:prstGeom prst="rect">
             <a:avLst/>
@@ -8155,7 +8647,7 @@
         <p:spPr>
           <a:xfrm>
             <a:off x="502920" y="4736520"/>
-            <a:ext cx="5577480" cy="1051200"/>
+            <a:ext cx="5577120" cy="1050840"/>
           </a:xfrm>
           <a:prstGeom prst="roundRect">
             <a:avLst>
@@ -8203,7 +8695,7 @@
         <p:spPr>
           <a:xfrm>
             <a:off x="731520" y="4736520"/>
-            <a:ext cx="5120280" cy="1051200"/>
+            <a:ext cx="5119920" cy="1050840"/>
           </a:xfrm>
           <a:prstGeom prst="rect">
             <a:avLst/>
@@ -8276,7 +8768,7 @@
         <p:spPr>
           <a:xfrm>
             <a:off x="6355080" y="1627560"/>
-            <a:ext cx="5348880" cy="273960"/>
+            <a:ext cx="5348520" cy="273600"/>
           </a:xfrm>
           <a:prstGeom prst="rect">
             <a:avLst/>
@@ -8337,7 +8829,7 @@
         <p:spPr>
           <a:xfrm>
             <a:off x="6355080" y="1901880"/>
-            <a:ext cx="5348880" cy="365400"/>
+            <a:ext cx="5348520" cy="365040"/>
           </a:xfrm>
           <a:prstGeom prst="rect">
             <a:avLst/>
@@ -8397,7 +8889,7 @@
         </p:nvGraphicFramePr>
         <p:xfrm>
           <a:off x="6355080" y="2331720"/>
-          <a:ext cx="5348880" cy="1371600"/>
+          <a:ext cx="5348520" cy="1371600"/>
         </p:xfrm>
         <a:graphic>
           <a:graphicData uri="http://schemas.openxmlformats.org/drawingml/2006/table">
@@ -9060,7 +9552,7 @@
         <p:spPr>
           <a:xfrm>
             <a:off x="6355080" y="3803760"/>
-            <a:ext cx="5348880" cy="712800"/>
+            <a:ext cx="5348520" cy="712440"/>
           </a:xfrm>
           <a:prstGeom prst="roundRect">
             <a:avLst>
@@ -9108,7 +9600,7 @@
         <p:spPr>
           <a:xfrm>
             <a:off x="6556320" y="3803760"/>
-            <a:ext cx="4946400" cy="712800"/>
+            <a:ext cx="4946040" cy="712440"/>
           </a:xfrm>
           <a:prstGeom prst="rect">
             <a:avLst/>
@@ -9181,7 +9673,7 @@
         <p:spPr>
           <a:xfrm>
             <a:off x="6355080" y="4663440"/>
-            <a:ext cx="5348880" cy="776880"/>
+            <a:ext cx="5348520" cy="776520"/>
           </a:xfrm>
           <a:prstGeom prst="roundRect">
             <a:avLst>
@@ -9229,7 +9721,7 @@
         <p:spPr>
           <a:xfrm>
             <a:off x="6556320" y="4663440"/>
-            <a:ext cx="4946400" cy="776880"/>
+            <a:ext cx="4946040" cy="776520"/>
           </a:xfrm>
           <a:prstGeom prst="rect">
             <a:avLst/>
@@ -9302,7 +9794,7 @@
         <p:spPr>
           <a:xfrm>
             <a:off x="11597400" y="6492240"/>
-            <a:ext cx="365400" cy="255600"/>
+            <a:ext cx="365040" cy="255240"/>
           </a:xfrm>
           <a:prstGeom prst="rect">
             <a:avLst/>
@@ -9400,7 +9892,7 @@
         <p:spPr>
           <a:xfrm>
             <a:off x="502920" y="384120"/>
-            <a:ext cx="5486040" cy="255600"/>
+            <a:ext cx="5485680" cy="255240"/>
           </a:xfrm>
           <a:prstGeom prst="rect">
             <a:avLst/>
@@ -9461,7 +9953,7 @@
         <p:spPr>
           <a:xfrm>
             <a:off x="502920" y="658440"/>
-            <a:ext cx="11155320" cy="566640"/>
+            <a:ext cx="11154960" cy="566280"/>
           </a:xfrm>
           <a:prstGeom prst="rect">
             <a:avLst/>
@@ -9522,7 +10014,7 @@
         <p:spPr>
           <a:xfrm>
             <a:off x="502920" y="1572840"/>
-            <a:ext cx="1660680" cy="1828440"/>
+            <a:ext cx="1660320" cy="1828080"/>
           </a:xfrm>
           <a:prstGeom prst="roundRect">
             <a:avLst>
@@ -9567,7 +10059,7 @@
         <p:spPr>
           <a:xfrm>
             <a:off x="502920" y="1810440"/>
-            <a:ext cx="1660680" cy="594000"/>
+            <a:ext cx="1660320" cy="593640"/>
           </a:xfrm>
           <a:prstGeom prst="rect">
             <a:avLst/>
@@ -9628,7 +10120,7 @@
         <p:spPr>
           <a:xfrm>
             <a:off x="612720" y="2450520"/>
-            <a:ext cx="1441440" cy="548280"/>
+            <a:ext cx="1441080" cy="547920"/>
           </a:xfrm>
           <a:prstGeom prst="rect">
             <a:avLst/>
@@ -9689,7 +10181,7 @@
         <p:spPr>
           <a:xfrm>
             <a:off x="612720" y="3063240"/>
-            <a:ext cx="1441440" cy="319680"/>
+            <a:ext cx="1441080" cy="319320"/>
           </a:xfrm>
           <a:prstGeom prst="rect">
             <a:avLst/>
@@ -9750,7 +10242,7 @@
         <p:spPr>
           <a:xfrm>
             <a:off x="2346840" y="1572840"/>
-            <a:ext cx="1660680" cy="1828440"/>
+            <a:ext cx="1660320" cy="1828080"/>
           </a:xfrm>
           <a:prstGeom prst="roundRect">
             <a:avLst>
@@ -9798,7 +10290,7 @@
         <p:spPr>
           <a:xfrm>
             <a:off x="2346840" y="1810440"/>
-            <a:ext cx="1660680" cy="594000"/>
+            <a:ext cx="1660320" cy="593640"/>
           </a:xfrm>
           <a:prstGeom prst="rect">
             <a:avLst/>
@@ -9859,7 +10351,7 @@
         <p:spPr>
           <a:xfrm>
             <a:off x="2456640" y="2450520"/>
-            <a:ext cx="1441440" cy="548280"/>
+            <a:ext cx="1441080" cy="547920"/>
           </a:xfrm>
           <a:prstGeom prst="rect">
             <a:avLst/>
@@ -9920,7 +10412,7 @@
         <p:spPr>
           <a:xfrm>
             <a:off x="2456640" y="3063240"/>
-            <a:ext cx="1441440" cy="319680"/>
+            <a:ext cx="1441080" cy="319320"/>
           </a:xfrm>
           <a:prstGeom prst="rect">
             <a:avLst/>
@@ -9981,7 +10473,7 @@
         <p:spPr>
           <a:xfrm>
             <a:off x="4191120" y="1572840"/>
-            <a:ext cx="1660680" cy="1828440"/>
+            <a:ext cx="1660320" cy="1828080"/>
           </a:xfrm>
           <a:prstGeom prst="roundRect">
             <a:avLst>
@@ -10029,7 +10521,7 @@
         <p:spPr>
           <a:xfrm>
             <a:off x="4191120" y="1810440"/>
-            <a:ext cx="1660680" cy="594000"/>
+            <a:ext cx="1660320" cy="593640"/>
           </a:xfrm>
           <a:prstGeom prst="rect">
             <a:avLst/>
@@ -10090,7 +10582,7 @@
         <p:spPr>
           <a:xfrm>
             <a:off x="4300560" y="2450520"/>
-            <a:ext cx="1441440" cy="548280"/>
+            <a:ext cx="1441080" cy="547920"/>
           </a:xfrm>
           <a:prstGeom prst="rect">
             <a:avLst/>
@@ -10151,7 +10643,7 @@
         <p:spPr>
           <a:xfrm>
             <a:off x="4300560" y="3063240"/>
-            <a:ext cx="1441440" cy="319680"/>
+            <a:ext cx="1441080" cy="319320"/>
           </a:xfrm>
           <a:prstGeom prst="rect">
             <a:avLst/>
@@ -10212,7 +10704,7 @@
         <p:spPr>
           <a:xfrm>
             <a:off x="502920" y="3611880"/>
-            <a:ext cx="5348880" cy="1508400"/>
+            <a:ext cx="5348520" cy="1508040"/>
           </a:xfrm>
           <a:prstGeom prst="roundRect">
             <a:avLst>
@@ -10260,7 +10752,7 @@
         <p:spPr>
           <a:xfrm>
             <a:off x="731520" y="3611880"/>
-            <a:ext cx="4891680" cy="1508400"/>
+            <a:ext cx="4891320" cy="1508040"/>
           </a:xfrm>
           <a:prstGeom prst="rect">
             <a:avLst/>
@@ -10333,7 +10825,7 @@
         <p:spPr>
           <a:xfrm>
             <a:off x="6172200" y="1572840"/>
-            <a:ext cx="5531760" cy="273960"/>
+            <a:ext cx="5531400" cy="273600"/>
           </a:xfrm>
           <a:prstGeom prst="rect">
             <a:avLst/>
@@ -10394,7 +10886,7 @@
         <p:spPr>
           <a:xfrm>
             <a:off x="6172200" y="1847160"/>
-            <a:ext cx="5531760" cy="502560"/>
+            <a:ext cx="5531400" cy="502200"/>
           </a:xfrm>
           <a:prstGeom prst="rect">
             <a:avLst/>
@@ -10459,7 +10951,7 @@
         <p:spPr>
           <a:xfrm>
             <a:off x="6400800" y="2450520"/>
-            <a:ext cx="2788560" cy="2441160"/>
+            <a:ext cx="2788200" cy="2440800"/>
           </a:xfrm>
           <a:prstGeom prst="rect">
             <a:avLst/>
@@ -10478,7 +10970,7 @@
         </p:nvGraphicFramePr>
         <p:xfrm>
           <a:off x="9418320" y="2788920"/>
-          <a:ext cx="2422800" cy="1151640"/>
+          <a:ext cx="2422800" cy="1151280"/>
         </p:xfrm>
         <a:graphic>
           <a:graphicData uri="http://schemas.openxmlformats.org/drawingml/2006/table">
@@ -11270,7 +11762,7 @@
         <p:spPr>
           <a:xfrm>
             <a:off x="6172200" y="5120640"/>
-            <a:ext cx="5531760" cy="914040"/>
+            <a:ext cx="5531400" cy="913680"/>
           </a:xfrm>
           <a:prstGeom prst="roundRect">
             <a:avLst>
@@ -11318,7 +11810,7 @@
         <p:spPr>
           <a:xfrm>
             <a:off x="6373440" y="5120640"/>
-            <a:ext cx="5129280" cy="914040"/>
+            <a:ext cx="5128920" cy="913680"/>
           </a:xfrm>
           <a:prstGeom prst="rect">
             <a:avLst/>
@@ -11391,7 +11883,7 @@
         <p:spPr>
           <a:xfrm>
             <a:off x="11597400" y="6492240"/>
-            <a:ext cx="365400" cy="255600"/>
+            <a:ext cx="365040" cy="255240"/>
           </a:xfrm>
           <a:prstGeom prst="rect">
             <a:avLst/>
@@ -11489,7 +11981,7 @@
         <p:spPr>
           <a:xfrm>
             <a:off x="502920" y="384120"/>
-            <a:ext cx="5486040" cy="255600"/>
+            <a:ext cx="5485680" cy="255240"/>
           </a:xfrm>
           <a:prstGeom prst="rect">
             <a:avLst/>
@@ -11550,7 +12042,7 @@
         <p:spPr>
           <a:xfrm>
             <a:off x="502920" y="658440"/>
-            <a:ext cx="11155320" cy="566640"/>
+            <a:ext cx="11154960" cy="566280"/>
           </a:xfrm>
           <a:prstGeom prst="rect">
             <a:avLst/>
@@ -11611,7 +12103,7 @@
         <p:spPr>
           <a:xfrm>
             <a:off x="502920" y="1417320"/>
-            <a:ext cx="5668920" cy="273960"/>
+            <a:ext cx="5668560" cy="273600"/>
           </a:xfrm>
           <a:prstGeom prst="rect">
             <a:avLst/>
@@ -11676,7 +12168,7 @@
         <p:spPr>
           <a:xfrm>
             <a:off x="1280160" y="1737360"/>
-            <a:ext cx="2834280" cy="2294640"/>
+            <a:ext cx="2833920" cy="2294280"/>
           </a:xfrm>
           <a:prstGeom prst="rect">
             <a:avLst/>
@@ -11695,7 +12187,7 @@
         </p:nvGraphicFramePr>
         <p:xfrm>
           <a:off x="502920" y="4160520"/>
-          <a:ext cx="5668920" cy="877320"/>
+          <a:ext cx="5668200" cy="876960"/>
         </p:xfrm>
         <a:graphic>
           <a:graphicData uri="http://schemas.openxmlformats.org/drawingml/2006/table">
@@ -12310,7 +12802,7 @@
         <p:spPr>
           <a:xfrm>
             <a:off x="502920" y="5139000"/>
-            <a:ext cx="5668920" cy="1005480"/>
+            <a:ext cx="5668560" cy="1005120"/>
           </a:xfrm>
           <a:prstGeom prst="rect">
             <a:avLst/>
@@ -12383,7 +12875,7 @@
         <p:spPr>
           <a:xfrm>
             <a:off x="6446520" y="1417320"/>
-            <a:ext cx="5257440" cy="273960"/>
+            <a:ext cx="5257080" cy="273600"/>
           </a:xfrm>
           <a:prstGeom prst="rect">
             <a:avLst/>
@@ -12444,7 +12936,7 @@
         <p:spPr>
           <a:xfrm>
             <a:off x="6446520" y="1700640"/>
-            <a:ext cx="5257440" cy="456840"/>
+            <a:ext cx="5257080" cy="456480"/>
           </a:xfrm>
           <a:prstGeom prst="rect">
             <a:avLst/>
@@ -12505,7 +12997,7 @@
         <p:spPr>
           <a:xfrm>
             <a:off x="6446520" y="2331720"/>
-            <a:ext cx="1630440" cy="1051200"/>
+            <a:ext cx="1630080" cy="1050840"/>
           </a:xfrm>
           <a:prstGeom prst="roundRect">
             <a:avLst>
@@ -12553,7 +13045,7 @@
         <p:spPr>
           <a:xfrm>
             <a:off x="6446520" y="2450520"/>
-            <a:ext cx="1630440" cy="456840"/>
+            <a:ext cx="1630080" cy="456480"/>
           </a:xfrm>
           <a:prstGeom prst="rect">
             <a:avLst/>
@@ -12614,7 +13106,7 @@
         <p:spPr>
           <a:xfrm>
             <a:off x="6519600" y="2926080"/>
-            <a:ext cx="1483920" cy="365400"/>
+            <a:ext cx="1483560" cy="365040"/>
           </a:xfrm>
           <a:prstGeom prst="rect">
             <a:avLst/>
@@ -12675,7 +13167,7 @@
         <p:spPr>
           <a:xfrm>
             <a:off x="8260200" y="2331720"/>
-            <a:ext cx="1630440" cy="1051200"/>
+            <a:ext cx="1630080" cy="1050840"/>
           </a:xfrm>
           <a:prstGeom prst="roundRect">
             <a:avLst>
@@ -12723,7 +13215,7 @@
         <p:spPr>
           <a:xfrm>
             <a:off x="8260200" y="2450520"/>
-            <a:ext cx="1630440" cy="456840"/>
+            <a:ext cx="1630080" cy="456480"/>
           </a:xfrm>
           <a:prstGeom prst="rect">
             <a:avLst/>
@@ -12784,7 +13276,7 @@
         <p:spPr>
           <a:xfrm>
             <a:off x="8333280" y="2926080"/>
-            <a:ext cx="1483920" cy="365400"/>
+            <a:ext cx="1483560" cy="365040"/>
           </a:xfrm>
           <a:prstGeom prst="rect">
             <a:avLst/>
@@ -12845,7 +13337,7 @@
         <p:spPr>
           <a:xfrm>
             <a:off x="10073520" y="2331720"/>
-            <a:ext cx="1630440" cy="1051200"/>
+            <a:ext cx="1630080" cy="1050840"/>
           </a:xfrm>
           <a:prstGeom prst="roundRect">
             <a:avLst>
@@ -12893,7 +13385,7 @@
         <p:spPr>
           <a:xfrm>
             <a:off x="10073520" y="2450520"/>
-            <a:ext cx="1630440" cy="456840"/>
+            <a:ext cx="1630080" cy="456480"/>
           </a:xfrm>
           <a:prstGeom prst="rect">
             <a:avLst/>
@@ -12954,7 +13446,7 @@
         <p:spPr>
           <a:xfrm>
             <a:off x="10146960" y="2926080"/>
-            <a:ext cx="1483920" cy="365400"/>
+            <a:ext cx="1483560" cy="365040"/>
           </a:xfrm>
           <a:prstGeom prst="rect">
             <a:avLst/>
@@ -13015,7 +13507,7 @@
         <p:spPr>
           <a:xfrm>
             <a:off x="6446520" y="3456360"/>
-            <a:ext cx="5257440" cy="228240"/>
+            <a:ext cx="5257080" cy="227880"/>
           </a:xfrm>
           <a:prstGeom prst="rect">
             <a:avLst/>
@@ -13076,7 +13568,7 @@
         <p:spPr>
           <a:xfrm>
             <a:off x="6446520" y="3886200"/>
-            <a:ext cx="5257440" cy="1416960"/>
+            <a:ext cx="5257080" cy="1416600"/>
           </a:xfrm>
           <a:prstGeom prst="roundRect">
             <a:avLst>
@@ -13124,7 +13616,7 @@
         <p:spPr>
           <a:xfrm>
             <a:off x="6675120" y="3886200"/>
-            <a:ext cx="4800240" cy="1416960"/>
+            <a:ext cx="4799880" cy="1416600"/>
           </a:xfrm>
           <a:prstGeom prst="rect">
             <a:avLst/>
@@ -13197,7 +13689,7 @@
         <p:spPr>
           <a:xfrm>
             <a:off x="11597400" y="6492240"/>
-            <a:ext cx="365400" cy="255600"/>
+            <a:ext cx="365040" cy="255240"/>
           </a:xfrm>
           <a:prstGeom prst="rect">
             <a:avLst/>
@@ -13295,7 +13787,7 @@
         <p:spPr>
           <a:xfrm>
             <a:off x="502920" y="384120"/>
-            <a:ext cx="5486040" cy="255600"/>
+            <a:ext cx="5485680" cy="255240"/>
           </a:xfrm>
           <a:prstGeom prst="rect">
             <a:avLst/>
@@ -13356,7 +13848,7 @@
         <p:spPr>
           <a:xfrm>
             <a:off x="502920" y="658440"/>
-            <a:ext cx="11155320" cy="566640"/>
+            <a:ext cx="11154960" cy="566280"/>
           </a:xfrm>
           <a:prstGeom prst="rect">
             <a:avLst/>
@@ -13417,7 +13909,7 @@
         <p:spPr>
           <a:xfrm>
             <a:off x="502920" y="1417320"/>
-            <a:ext cx="5348880" cy="273960"/>
+            <a:ext cx="5348520" cy="273600"/>
           </a:xfrm>
           <a:prstGeom prst="rect">
             <a:avLst/>
@@ -13478,7 +13970,7 @@
         <p:spPr>
           <a:xfrm>
             <a:off x="502920" y="1783080"/>
-            <a:ext cx="310680" cy="310680"/>
+            <a:ext cx="310320" cy="310320"/>
           </a:xfrm>
           <a:prstGeom prst="ellipse">
             <a:avLst/>
@@ -13521,7 +14013,7 @@
         <p:spPr>
           <a:xfrm>
             <a:off x="502920" y="1783080"/>
-            <a:ext cx="310680" cy="310680"/>
+            <a:ext cx="310320" cy="310320"/>
           </a:xfrm>
           <a:prstGeom prst="rect">
             <a:avLst/>
@@ -13582,7 +14074,7 @@
         <p:spPr>
           <a:xfrm>
             <a:off x="941760" y="1755720"/>
-            <a:ext cx="4910040" cy="273960"/>
+            <a:ext cx="4909680" cy="273600"/>
           </a:xfrm>
           <a:prstGeom prst="rect">
             <a:avLst/>
@@ -13643,7 +14135,7 @@
         <p:spPr>
           <a:xfrm>
             <a:off x="941760" y="2030040"/>
-            <a:ext cx="4910040" cy="319680"/>
+            <a:ext cx="4909680" cy="319320"/>
           </a:xfrm>
           <a:prstGeom prst="rect">
             <a:avLst/>
@@ -13704,7 +14196,7 @@
         <p:spPr>
           <a:xfrm>
             <a:off x="502920" y="2441520"/>
-            <a:ext cx="310680" cy="310680"/>
+            <a:ext cx="310320" cy="310320"/>
           </a:xfrm>
           <a:prstGeom prst="ellipse">
             <a:avLst/>
@@ -13747,7 +14239,7 @@
         <p:spPr>
           <a:xfrm>
             <a:off x="502920" y="2441520"/>
-            <a:ext cx="310680" cy="310680"/>
+            <a:ext cx="310320" cy="310320"/>
           </a:xfrm>
           <a:prstGeom prst="rect">
             <a:avLst/>
@@ -13808,7 +14300,7 @@
         <p:spPr>
           <a:xfrm>
             <a:off x="941760" y="2414160"/>
-            <a:ext cx="4910040" cy="273960"/>
+            <a:ext cx="4909680" cy="273600"/>
           </a:xfrm>
           <a:prstGeom prst="rect">
             <a:avLst/>
@@ -13869,7 +14361,7 @@
         <p:spPr>
           <a:xfrm>
             <a:off x="941760" y="2688480"/>
-            <a:ext cx="4910040" cy="319680"/>
+            <a:ext cx="4909680" cy="319320"/>
           </a:xfrm>
           <a:prstGeom prst="rect">
             <a:avLst/>
@@ -13930,7 +14422,7 @@
         <p:spPr>
           <a:xfrm>
             <a:off x="502920" y="3099960"/>
-            <a:ext cx="310680" cy="310680"/>
+            <a:ext cx="310320" cy="310320"/>
           </a:xfrm>
           <a:prstGeom prst="ellipse">
             <a:avLst/>
@@ -13973,7 +14465,7 @@
         <p:spPr>
           <a:xfrm>
             <a:off x="502920" y="3099960"/>
-            <a:ext cx="310680" cy="310680"/>
+            <a:ext cx="310320" cy="310320"/>
           </a:xfrm>
           <a:prstGeom prst="rect">
             <a:avLst/>
@@ -14034,7 +14526,7 @@
         <p:spPr>
           <a:xfrm>
             <a:off x="941760" y="3072240"/>
-            <a:ext cx="4910040" cy="273960"/>
+            <a:ext cx="4909680" cy="273600"/>
           </a:xfrm>
           <a:prstGeom prst="rect">
             <a:avLst/>
@@ -14095,7 +14587,7 @@
         <p:spPr>
           <a:xfrm>
             <a:off x="941760" y="3346560"/>
-            <a:ext cx="4910040" cy="319680"/>
+            <a:ext cx="4909680" cy="319320"/>
           </a:xfrm>
           <a:prstGeom prst="rect">
             <a:avLst/>
@@ -14156,7 +14648,7 @@
         <p:spPr>
           <a:xfrm>
             <a:off x="502920" y="3758040"/>
-            <a:ext cx="310680" cy="310680"/>
+            <a:ext cx="310320" cy="310320"/>
           </a:xfrm>
           <a:prstGeom prst="ellipse">
             <a:avLst/>
@@ -14199,7 +14691,7 @@
         <p:spPr>
           <a:xfrm>
             <a:off x="502920" y="3758040"/>
-            <a:ext cx="310680" cy="310680"/>
+            <a:ext cx="310320" cy="310320"/>
           </a:xfrm>
           <a:prstGeom prst="rect">
             <a:avLst/>
@@ -14260,7 +14752,7 @@
         <p:spPr>
           <a:xfrm>
             <a:off x="941760" y="3730680"/>
-            <a:ext cx="4910040" cy="273960"/>
+            <a:ext cx="4909680" cy="273600"/>
           </a:xfrm>
           <a:prstGeom prst="rect">
             <a:avLst/>
@@ -14321,7 +14813,7 @@
         <p:spPr>
           <a:xfrm>
             <a:off x="941760" y="4005000"/>
-            <a:ext cx="4910040" cy="319680"/>
+            <a:ext cx="4909680" cy="319320"/>
           </a:xfrm>
           <a:prstGeom prst="rect">
             <a:avLst/>
@@ -14382,7 +14874,7 @@
         <p:spPr>
           <a:xfrm>
             <a:off x="502920" y="4462200"/>
-            <a:ext cx="5348880" cy="502560"/>
+            <a:ext cx="5348520" cy="502200"/>
           </a:xfrm>
           <a:prstGeom prst="roundRect">
             <a:avLst>
@@ -14430,7 +14922,7 @@
         <p:spPr>
           <a:xfrm>
             <a:off x="685800" y="4462200"/>
-            <a:ext cx="4983120" cy="502560"/>
+            <a:ext cx="4982760" cy="502200"/>
           </a:xfrm>
           <a:prstGeom prst="rect">
             <a:avLst/>
@@ -14491,7 +14983,7 @@
         <p:spPr>
           <a:xfrm>
             <a:off x="6126480" y="1417320"/>
-            <a:ext cx="5577480" cy="1828440"/>
+            <a:ext cx="5577120" cy="1828080"/>
           </a:xfrm>
           <a:prstGeom prst="roundRect">
             <a:avLst>
@@ -14539,7 +15031,7 @@
         <p:spPr>
           <a:xfrm>
             <a:off x="6355080" y="1572840"/>
-            <a:ext cx="5120280" cy="273960"/>
+            <a:ext cx="5119920" cy="273600"/>
           </a:xfrm>
           <a:prstGeom prst="rect">
             <a:avLst/>
@@ -14600,7 +15092,7 @@
         <p:spPr>
           <a:xfrm>
             <a:off x="6355080" y="1865520"/>
-            <a:ext cx="5120280" cy="685440"/>
+            <a:ext cx="5119920" cy="685080"/>
           </a:xfrm>
           <a:prstGeom prst="rect">
             <a:avLst/>
@@ -14709,7 +15201,7 @@
         <p:spPr>
           <a:xfrm>
             <a:off x="6355080" y="2541960"/>
-            <a:ext cx="5120280" cy="594000"/>
+            <a:ext cx="5119920" cy="593640"/>
           </a:xfrm>
           <a:prstGeom prst="rect">
             <a:avLst/>
@@ -14770,7 +15262,7 @@
         <p:spPr>
           <a:xfrm>
             <a:off x="6126480" y="3401640"/>
-            <a:ext cx="5577480" cy="2285640"/>
+            <a:ext cx="5577120" cy="2285280"/>
           </a:xfrm>
           <a:prstGeom prst="roundRect">
             <a:avLst>
@@ -14818,7 +15310,7 @@
         <p:spPr>
           <a:xfrm>
             <a:off x="6355080" y="3566160"/>
-            <a:ext cx="5120280" cy="273960"/>
+            <a:ext cx="5119920" cy="273600"/>
           </a:xfrm>
           <a:prstGeom prst="rect">
             <a:avLst/>
@@ -14878,7 +15370,7 @@
         </p:nvGraphicFramePr>
         <p:xfrm>
           <a:off x="6355080" y="3877200"/>
-          <a:ext cx="5120280" cy="1097280"/>
+          <a:ext cx="5119920" cy="1097280"/>
         </p:xfrm>
         <a:graphic>
           <a:graphicData uri="http://schemas.openxmlformats.org/drawingml/2006/table">
@@ -15690,7 +16182,7 @@
         <p:spPr>
           <a:xfrm>
             <a:off x="6355080" y="5029200"/>
-            <a:ext cx="5120280" cy="594000"/>
+            <a:ext cx="5119920" cy="593640"/>
           </a:xfrm>
           <a:prstGeom prst="rect">
             <a:avLst/>
@@ -15763,7 +16255,7 @@
         <p:spPr>
           <a:xfrm>
             <a:off x="11597400" y="6492240"/>
-            <a:ext cx="365400" cy="255600"/>
+            <a:ext cx="365040" cy="255240"/>
           </a:xfrm>
           <a:prstGeom prst="rect">
             <a:avLst/>
@@ -15861,7 +16353,7 @@
         <p:spPr>
           <a:xfrm>
             <a:off x="502920" y="384120"/>
-            <a:ext cx="5486040" cy="255600"/>
+            <a:ext cx="5485680" cy="255240"/>
           </a:xfrm>
           <a:prstGeom prst="rect">
             <a:avLst/>
@@ -15922,7 +16414,7 @@
         <p:spPr>
           <a:xfrm>
             <a:off x="502920" y="658440"/>
-            <a:ext cx="11155320" cy="566640"/>
+            <a:ext cx="11154960" cy="566280"/>
           </a:xfrm>
           <a:prstGeom prst="rect">
             <a:avLst/>
@@ -15983,7 +16475,7 @@
         <p:spPr>
           <a:xfrm>
             <a:off x="502920" y="1207080"/>
-            <a:ext cx="11155320" cy="255600"/>
+            <a:ext cx="11154960" cy="255240"/>
           </a:xfrm>
           <a:prstGeom prst="rect">
             <a:avLst/>
@@ -17378,7 +17870,7 @@
         <p:spPr>
           <a:xfrm>
             <a:off x="6263640" y="1572840"/>
-            <a:ext cx="5440320" cy="1737000"/>
+            <a:ext cx="5439960" cy="1736640"/>
           </a:xfrm>
           <a:prstGeom prst="roundRect">
             <a:avLst>
@@ -17426,7 +17918,7 @@
         <p:spPr>
           <a:xfrm>
             <a:off x="6492240" y="1572840"/>
-            <a:ext cx="4983120" cy="1737000"/>
+            <a:ext cx="4982760" cy="1736640"/>
           </a:xfrm>
           <a:prstGeom prst="rect">
             <a:avLst/>
@@ -17499,7 +17991,7 @@
         <p:spPr>
           <a:xfrm>
             <a:off x="502920" y="3520440"/>
-            <a:ext cx="5440320" cy="1737000"/>
+            <a:ext cx="5439960" cy="1736640"/>
           </a:xfrm>
           <a:prstGeom prst="roundRect">
             <a:avLst>
@@ -17547,7 +18039,7 @@
         <p:spPr>
           <a:xfrm>
             <a:off x="731520" y="3657600"/>
-            <a:ext cx="4983120" cy="255600"/>
+            <a:ext cx="4982760" cy="255240"/>
           </a:xfrm>
           <a:prstGeom prst="rect">
             <a:avLst/>
@@ -17608,7 +18100,7 @@
         <p:spPr>
           <a:xfrm>
             <a:off x="731520" y="3977640"/>
-            <a:ext cx="4983120" cy="1142640"/>
+            <a:ext cx="4982760" cy="1142280"/>
           </a:xfrm>
           <a:prstGeom prst="rect">
             <a:avLst/>
@@ -17681,7 +18173,7 @@
         <p:spPr>
           <a:xfrm>
             <a:off x="6263640" y="3520440"/>
-            <a:ext cx="5440320" cy="1737000"/>
+            <a:ext cx="5439960" cy="1736640"/>
           </a:xfrm>
           <a:prstGeom prst="roundRect">
             <a:avLst>
@@ -17729,7 +18221,7 @@
         <p:spPr>
           <a:xfrm>
             <a:off x="6492240" y="3657600"/>
-            <a:ext cx="4983120" cy="255600"/>
+            <a:ext cx="4982760" cy="255240"/>
           </a:xfrm>
           <a:prstGeom prst="rect">
             <a:avLst/>
@@ -17790,7 +18282,7 @@
         <p:spPr>
           <a:xfrm>
             <a:off x="6492240" y="3977640"/>
-            <a:ext cx="4983120" cy="1142640"/>
+            <a:ext cx="4982760" cy="1142280"/>
           </a:xfrm>
           <a:prstGeom prst="rect">
             <a:avLst/>
@@ -17863,7 +18355,7 @@
         <p:spPr>
           <a:xfrm>
             <a:off x="11597400" y="6492240"/>
-            <a:ext cx="365400" cy="255600"/>
+            <a:ext cx="365040" cy="255240"/>
           </a:xfrm>
           <a:prstGeom prst="rect">
             <a:avLst/>
@@ -17961,7 +18453,7 @@
         <p:spPr>
           <a:xfrm>
             <a:off x="10241280" y="-1645920"/>
-            <a:ext cx="3840120" cy="3840120"/>
+            <a:ext cx="3839760" cy="3839760"/>
           </a:xfrm>
           <a:prstGeom prst="ellipse">
             <a:avLst/>
@@ -18004,7 +18496,7 @@
         <p:spPr>
           <a:xfrm>
             <a:off x="502920" y="411480"/>
-            <a:ext cx="5486040" cy="255600"/>
+            <a:ext cx="5485680" cy="255240"/>
           </a:xfrm>
           <a:prstGeom prst="rect">
             <a:avLst/>
@@ -18065,7 +18557,7 @@
         <p:spPr>
           <a:xfrm>
             <a:off x="502920" y="685800"/>
-            <a:ext cx="11155320" cy="548280"/>
+            <a:ext cx="11154960" cy="547920"/>
           </a:xfrm>
           <a:prstGeom prst="rect">
             <a:avLst/>
@@ -18126,7 +18618,7 @@
         <p:spPr>
           <a:xfrm>
             <a:off x="502920" y="1234440"/>
-            <a:ext cx="11155320" cy="273960"/>
+            <a:ext cx="11154960" cy="273600"/>
           </a:xfrm>
           <a:prstGeom prst="rect">
             <a:avLst/>
@@ -18187,7 +18679,7 @@
         <p:spPr>
           <a:xfrm>
             <a:off x="502920" y="1691640"/>
-            <a:ext cx="5577480" cy="255600"/>
+            <a:ext cx="5577120" cy="255240"/>
           </a:xfrm>
           <a:prstGeom prst="rect">
             <a:avLst/>
@@ -18248,7 +18740,7 @@
         <p:spPr>
           <a:xfrm>
             <a:off x="502920" y="1993320"/>
-            <a:ext cx="5577480" cy="658080"/>
+            <a:ext cx="5577120" cy="657720"/>
           </a:xfrm>
           <a:prstGeom prst="roundRect">
             <a:avLst>
@@ -18296,7 +18788,7 @@
         <p:spPr>
           <a:xfrm>
             <a:off x="685800" y="1993320"/>
-            <a:ext cx="5211720" cy="658080"/>
+            <a:ext cx="5211360" cy="657720"/>
           </a:xfrm>
           <a:prstGeom prst="rect">
             <a:avLst/>
@@ -18369,7 +18861,7 @@
         <p:spPr>
           <a:xfrm>
             <a:off x="502920" y="2770560"/>
-            <a:ext cx="5577480" cy="658080"/>
+            <a:ext cx="5577120" cy="657720"/>
           </a:xfrm>
           <a:prstGeom prst="roundRect">
             <a:avLst>
@@ -18417,7 +18909,7 @@
         <p:spPr>
           <a:xfrm>
             <a:off x="685800" y="2770560"/>
-            <a:ext cx="5211720" cy="658080"/>
+            <a:ext cx="5211360" cy="657720"/>
           </a:xfrm>
           <a:prstGeom prst="rect">
             <a:avLst/>
@@ -18490,7 +18982,7 @@
         <p:spPr>
           <a:xfrm>
             <a:off x="502920" y="3547800"/>
-            <a:ext cx="5577480" cy="658080"/>
+            <a:ext cx="5577120" cy="657720"/>
           </a:xfrm>
           <a:prstGeom prst="roundRect">
             <a:avLst>
@@ -18538,7 +19030,7 @@
         <p:spPr>
           <a:xfrm>
             <a:off x="685800" y="3547800"/>
-            <a:ext cx="5211720" cy="658080"/>
+            <a:ext cx="5211360" cy="657720"/>
           </a:xfrm>
           <a:prstGeom prst="rect">
             <a:avLst/>
@@ -18611,7 +19103,7 @@
         <p:spPr>
           <a:xfrm>
             <a:off x="502920" y="4370760"/>
-            <a:ext cx="5577480" cy="255600"/>
+            <a:ext cx="5577120" cy="255240"/>
           </a:xfrm>
           <a:prstGeom prst="rect">
             <a:avLst/>
@@ -18672,7 +19164,7 @@
         <p:spPr>
           <a:xfrm>
             <a:off x="502920" y="4645080"/>
-            <a:ext cx="5577480" cy="639720"/>
+            <a:ext cx="5577120" cy="639360"/>
           </a:xfrm>
           <a:prstGeom prst="rect">
             <a:avLst/>
@@ -18693,6 +19185,11 @@
             <a:noAutofit/>
           </a:bodyPr>
           <a:p>
+            <a:pPr>
+              <a:lnSpc>
+                <a:spcPct val="100000"/>
+              </a:lnSpc>
+            </a:pPr>
             <a:r>
               <a:rPr lang="en-US" sz="930" b="0" u="none" strike="noStrike">
                 <a:solidFill>
@@ -18773,7 +19270,7 @@
         <p:spPr>
           <a:xfrm>
             <a:off x="502920" y="5330880"/>
-            <a:ext cx="5577480" cy="411120"/>
+            <a:ext cx="5577120" cy="410760"/>
           </a:xfrm>
           <a:prstGeom prst="rect">
             <a:avLst/>
@@ -18834,7 +19331,7 @@
         <p:spPr>
           <a:xfrm>
             <a:off x="6400800" y="1691640"/>
-            <a:ext cx="5257440" cy="255600"/>
+            <a:ext cx="5257080" cy="255240"/>
           </a:xfrm>
           <a:prstGeom prst="rect">
             <a:avLst/>
@@ -18895,7 +19392,7 @@
         <p:spPr>
           <a:xfrm>
             <a:off x="6400800" y="2039040"/>
-            <a:ext cx="91080" cy="91080"/>
+            <a:ext cx="90720" cy="90720"/>
           </a:xfrm>
           <a:prstGeom prst="ellipse">
             <a:avLst/>
@@ -18914,7 +19411,7 @@
           <a:fontRef idx="minor"/>
         </p:style>
         <p:txBody>
-          <a:bodyPr lIns="90000" tIns="19440" rIns="90000" bIns="19440" anchor="t">
+          <a:bodyPr lIns="45360" tIns="19440" rIns="45360" bIns="19440" anchor="t">
             <a:noAutofit/>
           </a:bodyPr>
           <a:p>
@@ -18938,7 +19435,7 @@
         <p:spPr>
           <a:xfrm>
             <a:off x="6629400" y="1938600"/>
-            <a:ext cx="5028840" cy="658080"/>
+            <a:ext cx="5028480" cy="657720"/>
           </a:xfrm>
           <a:prstGeom prst="rect">
             <a:avLst/>
@@ -19011,7 +19508,7 @@
         <p:spPr>
           <a:xfrm>
             <a:off x="6400800" y="2770560"/>
-            <a:ext cx="91080" cy="91080"/>
+            <a:ext cx="90720" cy="90720"/>
           </a:xfrm>
           <a:prstGeom prst="ellipse">
             <a:avLst/>
@@ -19030,7 +19527,7 @@
           <a:fontRef idx="minor"/>
         </p:style>
         <p:txBody>
-          <a:bodyPr lIns="90000" tIns="19440" rIns="90000" bIns="19440" anchor="t">
+          <a:bodyPr lIns="45360" tIns="19440" rIns="45360" bIns="19440" anchor="t">
             <a:noAutofit/>
           </a:bodyPr>
           <a:p>
@@ -19054,7 +19551,7 @@
         <p:spPr>
           <a:xfrm>
             <a:off x="6629400" y="2670120"/>
-            <a:ext cx="5028840" cy="658080"/>
+            <a:ext cx="5028480" cy="657720"/>
           </a:xfrm>
           <a:prstGeom prst="rect">
             <a:avLst/>
@@ -19127,7 +19624,7 @@
         <p:spPr>
           <a:xfrm>
             <a:off x="6400800" y="3502080"/>
-            <a:ext cx="91080" cy="91080"/>
+            <a:ext cx="90720" cy="90720"/>
           </a:xfrm>
           <a:prstGeom prst="ellipse">
             <a:avLst/>
@@ -19146,7 +19643,7 @@
           <a:fontRef idx="minor"/>
         </p:style>
         <p:txBody>
-          <a:bodyPr lIns="90000" tIns="19440" rIns="90000" bIns="19440" anchor="t">
+          <a:bodyPr lIns="45360" tIns="19440" rIns="45360" bIns="19440" anchor="t">
             <a:noAutofit/>
           </a:bodyPr>
           <a:p>
@@ -19170,7 +19667,7 @@
         <p:spPr>
           <a:xfrm>
             <a:off x="6629400" y="3401640"/>
-            <a:ext cx="5028840" cy="658080"/>
+            <a:ext cx="5028480" cy="657720"/>
           </a:xfrm>
           <a:prstGeom prst="rect">
             <a:avLst/>
@@ -19243,7 +19740,7 @@
         <p:spPr>
           <a:xfrm>
             <a:off x="6400800" y="4233600"/>
-            <a:ext cx="91080" cy="91080"/>
+            <a:ext cx="90720" cy="90720"/>
           </a:xfrm>
           <a:prstGeom prst="ellipse">
             <a:avLst/>
@@ -19262,7 +19759,7 @@
           <a:fontRef idx="minor"/>
         </p:style>
         <p:txBody>
-          <a:bodyPr lIns="90000" tIns="19440" rIns="90000" bIns="19440" anchor="t">
+          <a:bodyPr lIns="45360" tIns="19440" rIns="45360" bIns="19440" anchor="t">
             <a:noAutofit/>
           </a:bodyPr>
           <a:p>
@@ -19286,7 +19783,7 @@
         <p:spPr>
           <a:xfrm>
             <a:off x="6629400" y="4133160"/>
-            <a:ext cx="5028840" cy="658080"/>
+            <a:ext cx="5028480" cy="657720"/>
           </a:xfrm>
           <a:prstGeom prst="rect">
             <a:avLst/>
@@ -19359,7 +19856,7 @@
         <p:spPr>
           <a:xfrm>
             <a:off x="502920" y="5989320"/>
-            <a:ext cx="11182680" cy="502560"/>
+            <a:ext cx="11182320" cy="502200"/>
           </a:xfrm>
           <a:prstGeom prst="roundRect">
             <a:avLst>
@@ -19407,7 +19904,7 @@
         <p:spPr>
           <a:xfrm>
             <a:off x="731520" y="5989320"/>
-            <a:ext cx="10698120" cy="502560"/>
+            <a:ext cx="10697760" cy="502200"/>
           </a:xfrm>
           <a:prstGeom prst="rect">
             <a:avLst/>
@@ -19480,7 +19977,7 @@
         <p:spPr>
           <a:xfrm>
             <a:off x="11597400" y="6492240"/>
-            <a:ext cx="365400" cy="255600"/>
+            <a:ext cx="365040" cy="255240"/>
           </a:xfrm>
           <a:prstGeom prst="rect">
             <a:avLst/>
